--- a/exam-generator/sp025-exam-generator/c5/files.pptx
+++ b/exam-generator/sp025-exam-generator/c5/files.pptx
@@ -5,12 +5,18 @@
     <p:sldMasterId id="2147483648" r:id="rId1"/>
   </p:sldMasterIdLst>
   <p:notesMasterIdLst>
-    <p:notesMasterId r:id="rId5"/>
+    <p:notesMasterId r:id="rId11"/>
   </p:notesMasterIdLst>
   <p:sldIdLst>
     <p:sldId id="258" r:id="rId2"/>
     <p:sldId id="256" r:id="rId3"/>
     <p:sldId id="259" r:id="rId4"/>
+    <p:sldId id="260" r:id="rId5"/>
+    <p:sldId id="261" r:id="rId6"/>
+    <p:sldId id="267" r:id="rId7"/>
+    <p:sldId id="268" r:id="rId8"/>
+    <p:sldId id="269" r:id="rId9"/>
+    <p:sldId id="270" r:id="rId10"/>
   </p:sldIdLst>
   <p:sldSz cx="12192000" cy="6858000"/>
   <p:notesSz cx="6858000" cy="9144000"/>
@@ -109,6 +115,11 @@
       </a:defRPr>
     </a:lvl9pPr>
   </p:defaultTextStyle>
+  <p:extLst>
+    <p:ext uri="{EFAFB233-063F-42B5-8137-9DF3F51BA10A}">
+      <p15:sldGuideLst xmlns:p15="http://schemas.microsoft.com/office/powerpoint/2012/main"/>
+    </p:ext>
+  </p:extLst>
 </p:presentation>
 </file>
 
@@ -194,7 +205,7 @@
           <a:p>
             <a:fld id="{E930CEF5-4124-458A-8583-FB2A0D68282E}" type="datetimeFigureOut">
               <a:rPr lang="en-MY" smtClean="0"/>
-              <a:t>16/3/2026</a:t>
+              <a:t>16/4/2026</a:t>
             </a:fld>
             <a:endParaRPr lang="en-MY"/>
           </a:p>
@@ -602,8 +613,8 @@
         </p:nvSpPr>
         <p:spPr/>
       </p:sp>
-      <mc:AlternateContent xmlns:mc="http://schemas.openxmlformats.org/markup-compatibility/2006">
-        <mc:Choice xmlns:a14="http://schemas.microsoft.com/office/drawing/2010/main" Requires="a14">
+      <mc:AlternateContent xmlns:mc="http://schemas.openxmlformats.org/markup-compatibility/2006" xmlns:a14="http://schemas.microsoft.com/office/drawing/2010/main">
+        <mc:Choice Requires="a14">
           <p:sp>
             <p:nvSpPr>
               <p:cNvPr id="3" name="Notes Placeholder 2"/>
@@ -619,6 +630,7 @@
               <a:bodyPr/>
               <a:lstStyle/>
               <a:p>
+                <a:pPr/>
                 <a14:m>
                   <m:oMathPara xmlns:m="http://schemas.openxmlformats.org/officeDocument/2006/math">
                     <m:oMathParaPr>
@@ -651,7 +663,7 @@
             </p:txBody>
           </p:sp>
         </mc:Choice>
-        <mc:Fallback>
+        <mc:Fallback xmlns="">
           <p:sp>
             <p:nvSpPr>
               <p:cNvPr id="3" name="Notes Placeholder 2"/>
@@ -975,7 +987,7 @@
           <a:p>
             <a:fld id="{55736931-D21D-4CEE-8596-8652B0B9C773}" type="datetimeFigureOut">
               <a:rPr lang="en-MY" smtClean="0"/>
-              <a:t>16/3/2026</a:t>
+              <a:t>16/4/2026</a:t>
             </a:fld>
             <a:endParaRPr lang="en-MY"/>
           </a:p>
@@ -1175,7 +1187,7 @@
           <a:p>
             <a:fld id="{55736931-D21D-4CEE-8596-8652B0B9C773}" type="datetimeFigureOut">
               <a:rPr lang="en-MY" smtClean="0"/>
-              <a:t>16/3/2026</a:t>
+              <a:t>16/4/2026</a:t>
             </a:fld>
             <a:endParaRPr lang="en-MY"/>
           </a:p>
@@ -1385,7 +1397,7 @@
           <a:p>
             <a:fld id="{55736931-D21D-4CEE-8596-8652B0B9C773}" type="datetimeFigureOut">
               <a:rPr lang="en-MY" smtClean="0"/>
-              <a:t>16/3/2026</a:t>
+              <a:t>16/4/2026</a:t>
             </a:fld>
             <a:endParaRPr lang="en-MY"/>
           </a:p>
@@ -1585,7 +1597,7 @@
           <a:p>
             <a:fld id="{55736931-D21D-4CEE-8596-8652B0B9C773}" type="datetimeFigureOut">
               <a:rPr lang="en-MY" smtClean="0"/>
-              <a:t>16/3/2026</a:t>
+              <a:t>16/4/2026</a:t>
             </a:fld>
             <a:endParaRPr lang="en-MY"/>
           </a:p>
@@ -1861,7 +1873,7 @@
           <a:p>
             <a:fld id="{55736931-D21D-4CEE-8596-8652B0B9C773}" type="datetimeFigureOut">
               <a:rPr lang="en-MY" smtClean="0"/>
-              <a:t>16/3/2026</a:t>
+              <a:t>16/4/2026</a:t>
             </a:fld>
             <a:endParaRPr lang="en-MY"/>
           </a:p>
@@ -2129,7 +2141,7 @@
           <a:p>
             <a:fld id="{55736931-D21D-4CEE-8596-8652B0B9C773}" type="datetimeFigureOut">
               <a:rPr lang="en-MY" smtClean="0"/>
-              <a:t>16/3/2026</a:t>
+              <a:t>16/4/2026</a:t>
             </a:fld>
             <a:endParaRPr lang="en-MY"/>
           </a:p>
@@ -2544,7 +2556,7 @@
           <a:p>
             <a:fld id="{55736931-D21D-4CEE-8596-8652B0B9C773}" type="datetimeFigureOut">
               <a:rPr lang="en-MY" smtClean="0"/>
-              <a:t>16/3/2026</a:t>
+              <a:t>16/4/2026</a:t>
             </a:fld>
             <a:endParaRPr lang="en-MY"/>
           </a:p>
@@ -2686,7 +2698,7 @@
           <a:p>
             <a:fld id="{55736931-D21D-4CEE-8596-8652B0B9C773}" type="datetimeFigureOut">
               <a:rPr lang="en-MY" smtClean="0"/>
-              <a:t>16/3/2026</a:t>
+              <a:t>16/4/2026</a:t>
             </a:fld>
             <a:endParaRPr lang="en-MY"/>
           </a:p>
@@ -2799,7 +2811,7 @@
           <a:p>
             <a:fld id="{55736931-D21D-4CEE-8596-8652B0B9C773}" type="datetimeFigureOut">
               <a:rPr lang="en-MY" smtClean="0"/>
-              <a:t>16/3/2026</a:t>
+              <a:t>16/4/2026</a:t>
             </a:fld>
             <a:endParaRPr lang="en-MY"/>
           </a:p>
@@ -3112,7 +3124,7 @@
           <a:p>
             <a:fld id="{55736931-D21D-4CEE-8596-8652B0B9C773}" type="datetimeFigureOut">
               <a:rPr lang="en-MY" smtClean="0"/>
-              <a:t>16/3/2026</a:t>
+              <a:t>16/4/2026</a:t>
             </a:fld>
             <a:endParaRPr lang="en-MY"/>
           </a:p>
@@ -3401,7 +3413,7 @@
           <a:p>
             <a:fld id="{55736931-D21D-4CEE-8596-8652B0B9C773}" type="datetimeFigureOut">
               <a:rPr lang="en-MY" smtClean="0"/>
-              <a:t>16/3/2026</a:t>
+              <a:t>16/4/2026</a:t>
             </a:fld>
             <a:endParaRPr lang="en-MY"/>
           </a:p>
@@ -3644,7 +3656,7 @@
           <a:p>
             <a:fld id="{55736931-D21D-4CEE-8596-8652B0B9C773}" type="datetimeFigureOut">
               <a:rPr lang="en-MY" smtClean="0"/>
-              <a:t>16/3/2026</a:t>
+              <a:t>16/4/2026</a:t>
             </a:fld>
             <a:endParaRPr lang="en-MY"/>
           </a:p>
@@ -4378,6 +4390,2873 @@
     <p:extLst>
       <p:ext uri="{BB962C8B-B14F-4D97-AF65-F5344CB8AC3E}">
         <p14:creationId xmlns:p14="http://schemas.microsoft.com/office/powerpoint/2010/main" val="3487791714"/>
+      </p:ext>
+    </p:extLst>
+  </p:cSld>
+  <p:clrMapOvr>
+    <a:masterClrMapping/>
+  </p:clrMapOvr>
+</p:sld>
+</file>
+
+<file path=ppt/slides/slide4.xml><?xml version="1.0" encoding="utf-8"?>
+<p:sld xmlns:a="http://schemas.openxmlformats.org/drawingml/2006/main" xmlns:r="http://schemas.openxmlformats.org/officeDocument/2006/relationships" xmlns:p="http://schemas.openxmlformats.org/presentationml/2006/main">
+  <p:cSld>
+    <p:spTree>
+      <p:nvGrpSpPr>
+        <p:cNvPr id="1" name="">
+          <a:extLst>
+            <a:ext uri="{FF2B5EF4-FFF2-40B4-BE49-F238E27FC236}">
+              <a16:creationId xmlns:a16="http://schemas.microsoft.com/office/drawing/2014/main" id="{E371213B-CB77-4489-8740-FC3B3474D75A}"/>
+            </a:ext>
+          </a:extLst>
+        </p:cNvPr>
+        <p:cNvGrpSpPr/>
+        <p:nvPr/>
+      </p:nvGrpSpPr>
+      <p:grpSpPr>
+        <a:xfrm>
+          <a:off x="0" y="0"/>
+          <a:ext cx="0" cy="0"/>
+          <a:chOff x="0" y="0"/>
+          <a:chExt cx="0" cy="0"/>
+        </a:xfrm>
+      </p:grpSpPr>
+      <p:pic>
+        <p:nvPicPr>
+          <p:cNvPr id="3" name="Picture 2">
+            <a:extLst>
+              <a:ext uri="{FF2B5EF4-FFF2-40B4-BE49-F238E27FC236}">
+                <a16:creationId xmlns:a16="http://schemas.microsoft.com/office/drawing/2014/main" id="{2FA7608C-B236-FE67-8607-BD7EBEB92D80}"/>
+              </a:ext>
+            </a:extLst>
+          </p:cNvPr>
+          <p:cNvPicPr>
+            <a:picLocks noChangeAspect="1"/>
+          </p:cNvPicPr>
+          <p:nvPr/>
+        </p:nvPicPr>
+        <p:blipFill>
+          <a:blip r:embed="rId2"/>
+          <a:stretch>
+            <a:fillRect/>
+          </a:stretch>
+        </p:blipFill>
+        <p:spPr>
+          <a:xfrm>
+            <a:off x="4512632" y="213571"/>
+            <a:ext cx="4004936" cy="1375742"/>
+          </a:xfrm>
+          <a:prstGeom prst="rect">
+            <a:avLst/>
+          </a:prstGeom>
+        </p:spPr>
+      </p:pic>
+      <p:sp>
+        <p:nvSpPr>
+          <p:cNvPr id="5" name="TextBox 4">
+            <a:extLst>
+              <a:ext uri="{FF2B5EF4-FFF2-40B4-BE49-F238E27FC236}">
+                <a16:creationId xmlns:a16="http://schemas.microsoft.com/office/drawing/2014/main" id="{DF2DFC49-A17E-1F8D-C97D-4FA155269DA3}"/>
+              </a:ext>
+            </a:extLst>
+          </p:cNvPr>
+          <p:cNvSpPr txBox="1"/>
+          <p:nvPr/>
+        </p:nvSpPr>
+        <p:spPr>
+          <a:xfrm>
+            <a:off x="342899" y="1923481"/>
+            <a:ext cx="11500757" cy="1477328"/>
+          </a:xfrm>
+          <a:prstGeom prst="rect">
+            <a:avLst/>
+          </a:prstGeom>
+          <a:noFill/>
+        </p:spPr>
+        <p:txBody>
+          <a:bodyPr wrap="square">
+            <a:spAutoFit/>
+          </a:bodyPr>
+          <a:lstStyle/>
+          <a:p>
+            <a:pPr>
+              <a:buNone/>
+            </a:pPr>
+            <a:r>
+              <a:rPr lang="en-US" dirty="0">
+                <a:latin typeface="Times New Roman" panose="02020603050405020304" pitchFamily="18" charset="0"/>
+                <a:cs typeface="Times New Roman" panose="02020603050405020304" pitchFamily="18" charset="0"/>
+              </a:rPr>
+              <a:t>5. a) FIGURE 5 shows a graph of alternating current through a 220 Ω resistor.</a:t>
+            </a:r>
+          </a:p>
+          <a:p>
+            <a:pPr marL="400050" indent="-400050">
+              <a:buAutoNum type="romanLcParenR"/>
+            </a:pPr>
+            <a:r>
+              <a:rPr lang="en-US" dirty="0">
+                <a:latin typeface="Times New Roman" panose="02020603050405020304" pitchFamily="18" charset="0"/>
+                <a:cs typeface="Times New Roman" panose="02020603050405020304" pitchFamily="18" charset="0"/>
+              </a:rPr>
+              <a:t>Calculate the rms current through the resistor </a:t>
+            </a:r>
+          </a:p>
+          <a:p>
+            <a:pPr marL="400050" indent="-400050">
+              <a:buAutoNum type="romanLcParenR"/>
+            </a:pPr>
+            <a:r>
+              <a:rPr lang="en-US" dirty="0">
+                <a:latin typeface="Times New Roman" panose="02020603050405020304" pitchFamily="18" charset="0"/>
+                <a:cs typeface="Times New Roman" panose="02020603050405020304" pitchFamily="18" charset="0"/>
+              </a:rPr>
+              <a:t>Calculate the peak voltage across the resistor </a:t>
+            </a:r>
+          </a:p>
+          <a:p>
+            <a:pPr marL="400050" indent="-400050">
+              <a:buAutoNum type="romanLcParenR"/>
+            </a:pPr>
+            <a:r>
+              <a:rPr lang="en-US" dirty="0">
+                <a:latin typeface="Times New Roman" panose="02020603050405020304" pitchFamily="18" charset="0"/>
+                <a:cs typeface="Times New Roman" panose="02020603050405020304" pitchFamily="18" charset="0"/>
+              </a:rPr>
+              <a:t>Write the equation of voltage across the resistor iv) Calculate the average power dissipated by the resistor</a:t>
+            </a:r>
+          </a:p>
+          <a:p>
+            <a:pPr algn="r">
+              <a:buNone/>
+            </a:pPr>
+            <a:r>
+              <a:rPr lang="en-US" dirty="0">
+                <a:latin typeface="Times New Roman" panose="02020603050405020304" pitchFamily="18" charset="0"/>
+                <a:cs typeface="Times New Roman" panose="02020603050405020304" pitchFamily="18" charset="0"/>
+              </a:rPr>
+              <a:t>[6 marks]</a:t>
+            </a:r>
+          </a:p>
+        </p:txBody>
+      </p:sp>
+      <p:sp>
+        <p:nvSpPr>
+          <p:cNvPr id="7" name="TextBox 6">
+            <a:extLst>
+              <a:ext uri="{FF2B5EF4-FFF2-40B4-BE49-F238E27FC236}">
+                <a16:creationId xmlns:a16="http://schemas.microsoft.com/office/drawing/2014/main" id="{72683997-8120-C975-C3D1-C6DA2BB36731}"/>
+              </a:ext>
+            </a:extLst>
+          </p:cNvPr>
+          <p:cNvSpPr txBox="1"/>
+          <p:nvPr/>
+        </p:nvSpPr>
+        <p:spPr>
+          <a:xfrm>
+            <a:off x="342898" y="3734977"/>
+            <a:ext cx="11500757" cy="1200329"/>
+          </a:xfrm>
+          <a:prstGeom prst="rect">
+            <a:avLst/>
+          </a:prstGeom>
+          <a:noFill/>
+        </p:spPr>
+        <p:txBody>
+          <a:bodyPr wrap="square">
+            <a:spAutoFit/>
+          </a:bodyPr>
+          <a:lstStyle/>
+          <a:p>
+            <a:pPr>
+              <a:buNone/>
+            </a:pPr>
+            <a:r>
+              <a:rPr lang="en-US" dirty="0">
+                <a:latin typeface="Times New Roman" panose="02020603050405020304" pitchFamily="18" charset="0"/>
+                <a:cs typeface="Times New Roman" panose="02020603050405020304" pitchFamily="18" charset="0"/>
+              </a:rPr>
+              <a:t>b) A sinusoidal voltage V(t) = 20 sin (50πt) is applied to a series RLC circuit with R = 670 Ω, L = 250 </a:t>
+            </a:r>
+            <a:r>
+              <a:rPr lang="en-US" dirty="0" err="1">
+                <a:latin typeface="Times New Roman" panose="02020603050405020304" pitchFamily="18" charset="0"/>
+                <a:cs typeface="Times New Roman" panose="02020603050405020304" pitchFamily="18" charset="0"/>
+              </a:rPr>
+              <a:t>mH</a:t>
+            </a:r>
+            <a:r>
+              <a:rPr lang="en-US" dirty="0">
+                <a:latin typeface="Times New Roman" panose="02020603050405020304" pitchFamily="18" charset="0"/>
+                <a:cs typeface="Times New Roman" panose="02020603050405020304" pitchFamily="18" charset="0"/>
+              </a:rPr>
+              <a:t> and C = 47 </a:t>
+            </a:r>
+            <a:r>
+              <a:rPr lang="en-US" dirty="0" err="1">
+                <a:latin typeface="Times New Roman" panose="02020603050405020304" pitchFamily="18" charset="0"/>
+                <a:cs typeface="Times New Roman" panose="02020603050405020304" pitchFamily="18" charset="0"/>
+              </a:rPr>
+              <a:t>μF</a:t>
+            </a:r>
+            <a:r>
+              <a:rPr lang="en-US" dirty="0">
+                <a:latin typeface="Times New Roman" panose="02020603050405020304" pitchFamily="18" charset="0"/>
+                <a:cs typeface="Times New Roman" panose="02020603050405020304" pitchFamily="18" charset="0"/>
+              </a:rPr>
+              <a:t>.</a:t>
+            </a:r>
+          </a:p>
+          <a:p>
+            <a:pPr marL="400050" indent="-400050">
+              <a:buAutoNum type="romanLcParenR"/>
+            </a:pPr>
+            <a:r>
+              <a:rPr lang="en-US" dirty="0">
+                <a:latin typeface="Times New Roman" panose="02020603050405020304" pitchFamily="18" charset="0"/>
+                <a:cs typeface="Times New Roman" panose="02020603050405020304" pitchFamily="18" charset="0"/>
+              </a:rPr>
+              <a:t>Calculate the impedance of the circuit </a:t>
+            </a:r>
+          </a:p>
+          <a:p>
+            <a:pPr marL="400050" indent="-400050">
+              <a:buAutoNum type="romanLcParenR"/>
+            </a:pPr>
+            <a:r>
+              <a:rPr lang="en-US" dirty="0">
+                <a:latin typeface="Times New Roman" panose="02020603050405020304" pitchFamily="18" charset="0"/>
+                <a:cs typeface="Times New Roman" panose="02020603050405020304" pitchFamily="18" charset="0"/>
+              </a:rPr>
+              <a:t>Calculate the phase angle of the circuit</a:t>
+            </a:r>
+          </a:p>
+          <a:p>
+            <a:pPr algn="r">
+              <a:buNone/>
+            </a:pPr>
+            <a:r>
+              <a:rPr lang="en-US" dirty="0">
+                <a:latin typeface="Times New Roman" panose="02020603050405020304" pitchFamily="18" charset="0"/>
+                <a:cs typeface="Times New Roman" panose="02020603050405020304" pitchFamily="18" charset="0"/>
+              </a:rPr>
+              <a:t>[4 marks]</a:t>
+            </a:r>
+          </a:p>
+        </p:txBody>
+      </p:sp>
+      <p:pic>
+        <p:nvPicPr>
+          <p:cNvPr id="9" name="Picture 8">
+            <a:extLst>
+              <a:ext uri="{FF2B5EF4-FFF2-40B4-BE49-F238E27FC236}">
+                <a16:creationId xmlns:a16="http://schemas.microsoft.com/office/drawing/2014/main" id="{2FF9524A-2FCE-E445-E511-47E50490B486}"/>
+              </a:ext>
+            </a:extLst>
+          </p:cNvPr>
+          <p:cNvPicPr>
+            <a:picLocks noChangeAspect="1"/>
+          </p:cNvPicPr>
+          <p:nvPr/>
+        </p:nvPicPr>
+        <p:blipFill>
+          <a:blip r:embed="rId3"/>
+          <a:stretch>
+            <a:fillRect/>
+          </a:stretch>
+        </p:blipFill>
+        <p:spPr>
+          <a:xfrm>
+            <a:off x="7222336" y="5348848"/>
+            <a:ext cx="4801270" cy="1295581"/>
+          </a:xfrm>
+          <a:prstGeom prst="rect">
+            <a:avLst/>
+          </a:prstGeom>
+        </p:spPr>
+      </p:pic>
+    </p:spTree>
+    <p:extLst>
+      <p:ext uri="{BB962C8B-B14F-4D97-AF65-F5344CB8AC3E}">
+        <p14:creationId xmlns:p14="http://schemas.microsoft.com/office/powerpoint/2010/main" val="167900759"/>
+      </p:ext>
+    </p:extLst>
+  </p:cSld>
+  <p:clrMapOvr>
+    <a:masterClrMapping/>
+  </p:clrMapOvr>
+</p:sld>
+</file>
+
+<file path=ppt/slides/slide5.xml><?xml version="1.0" encoding="utf-8"?>
+<p:sld xmlns:a="http://schemas.openxmlformats.org/drawingml/2006/main" xmlns:r="http://schemas.openxmlformats.org/officeDocument/2006/relationships" xmlns:p="http://schemas.openxmlformats.org/presentationml/2006/main">
+  <p:cSld>
+    <p:spTree>
+      <p:nvGrpSpPr>
+        <p:cNvPr id="1" name="">
+          <a:extLst>
+            <a:ext uri="{FF2B5EF4-FFF2-40B4-BE49-F238E27FC236}">
+              <a16:creationId xmlns:a16="http://schemas.microsoft.com/office/drawing/2014/main" id="{6C1E72D4-6C8B-7FC3-CB47-15C1587D99F8}"/>
+            </a:ext>
+          </a:extLst>
+        </p:cNvPr>
+        <p:cNvGrpSpPr/>
+        <p:nvPr/>
+      </p:nvGrpSpPr>
+      <p:grpSpPr>
+        <a:xfrm>
+          <a:off x="0" y="0"/>
+          <a:ext cx="0" cy="0"/>
+          <a:chOff x="0" y="0"/>
+          <a:chExt cx="0" cy="0"/>
+        </a:xfrm>
+      </p:grpSpPr>
+      <p:pic>
+        <p:nvPicPr>
+          <p:cNvPr id="3" name="Picture 2">
+            <a:extLst>
+              <a:ext uri="{FF2B5EF4-FFF2-40B4-BE49-F238E27FC236}">
+                <a16:creationId xmlns:a16="http://schemas.microsoft.com/office/drawing/2014/main" id="{9306B72F-990D-52FA-5848-A1FB30045E78}"/>
+              </a:ext>
+            </a:extLst>
+          </p:cNvPr>
+          <p:cNvPicPr>
+            <a:picLocks noChangeAspect="1"/>
+          </p:cNvPicPr>
+          <p:nvPr/>
+        </p:nvPicPr>
+        <p:blipFill>
+          <a:blip r:embed="rId2"/>
+          <a:stretch>
+            <a:fillRect/>
+          </a:stretch>
+        </p:blipFill>
+        <p:spPr>
+          <a:xfrm>
+            <a:off x="461241" y="636161"/>
+            <a:ext cx="2543530" cy="1562318"/>
+          </a:xfrm>
+          <a:prstGeom prst="rect">
+            <a:avLst/>
+          </a:prstGeom>
+        </p:spPr>
+      </p:pic>
+      <p:pic>
+        <p:nvPicPr>
+          <p:cNvPr id="5" name="Picture 4">
+            <a:extLst>
+              <a:ext uri="{FF2B5EF4-FFF2-40B4-BE49-F238E27FC236}">
+                <a16:creationId xmlns:a16="http://schemas.microsoft.com/office/drawing/2014/main" id="{E6AD7F64-D38B-6BF0-2AD1-9A4F179783D9}"/>
+              </a:ext>
+            </a:extLst>
+          </p:cNvPr>
+          <p:cNvPicPr>
+            <a:picLocks noChangeAspect="1"/>
+          </p:cNvPicPr>
+          <p:nvPr/>
+        </p:nvPicPr>
+        <p:blipFill>
+          <a:blip r:embed="rId3"/>
+          <a:stretch>
+            <a:fillRect/>
+          </a:stretch>
+        </p:blipFill>
+        <p:spPr>
+          <a:xfrm>
+            <a:off x="461241" y="2313893"/>
+            <a:ext cx="2248214" cy="1886213"/>
+          </a:xfrm>
+          <a:prstGeom prst="rect">
+            <a:avLst/>
+          </a:prstGeom>
+        </p:spPr>
+      </p:pic>
+      <p:sp>
+        <p:nvSpPr>
+          <p:cNvPr id="7" name="TextBox 6">
+            <a:extLst>
+              <a:ext uri="{FF2B5EF4-FFF2-40B4-BE49-F238E27FC236}">
+                <a16:creationId xmlns:a16="http://schemas.microsoft.com/office/drawing/2014/main" id="{6341F0B8-9856-6405-D48A-D510C9E832CC}"/>
+              </a:ext>
+            </a:extLst>
+          </p:cNvPr>
+          <p:cNvSpPr txBox="1"/>
+          <p:nvPr/>
+        </p:nvSpPr>
+        <p:spPr>
+          <a:xfrm>
+            <a:off x="3045823" y="423930"/>
+            <a:ext cx="8684936" cy="1477328"/>
+          </a:xfrm>
+          <a:prstGeom prst="rect">
+            <a:avLst/>
+          </a:prstGeom>
+          <a:noFill/>
+        </p:spPr>
+        <p:txBody>
+          <a:bodyPr wrap="square">
+            <a:spAutoFit/>
+          </a:bodyPr>
+          <a:lstStyle/>
+          <a:p>
+            <a:pPr>
+              <a:buNone/>
+            </a:pPr>
+            <a:r>
+              <a:rPr lang="en-US" b="1" dirty="0">
+                <a:latin typeface="Times New Roman" panose="02020603050405020304" pitchFamily="18" charset="0"/>
+                <a:cs typeface="Times New Roman" panose="02020603050405020304" pitchFamily="18" charset="0"/>
+              </a:rPr>
+              <a:t>5. a) FIGURE 5a</a:t>
+            </a:r>
+            <a:r>
+              <a:rPr lang="en-US" dirty="0">
+                <a:latin typeface="Times New Roman" panose="02020603050405020304" pitchFamily="18" charset="0"/>
+                <a:cs typeface="Times New Roman" panose="02020603050405020304" pitchFamily="18" charset="0"/>
+              </a:rPr>
+              <a:t> shows graphs of sinusoidal alternating current (AC) and a sinusoidal alternating voltage against time across a resistor R.</a:t>
+            </a:r>
+          </a:p>
+          <a:p>
+            <a:pPr marL="400050" indent="-400050">
+              <a:buAutoNum type="romanLcParenR"/>
+            </a:pPr>
+            <a:r>
+              <a:rPr lang="en-US" dirty="0">
+                <a:latin typeface="Times New Roman" panose="02020603050405020304" pitchFamily="18" charset="0"/>
+                <a:cs typeface="Times New Roman" panose="02020603050405020304" pitchFamily="18" charset="0"/>
+              </a:rPr>
+              <a:t>Calculate the resistance R.</a:t>
+            </a:r>
+          </a:p>
+          <a:p>
+            <a:pPr marL="400050" indent="-400050">
+              <a:buAutoNum type="romanLcParenR"/>
+            </a:pPr>
+            <a:r>
+              <a:rPr lang="en-US" dirty="0">
+                <a:latin typeface="Times New Roman" panose="02020603050405020304" pitchFamily="18" charset="0"/>
+                <a:cs typeface="Times New Roman" panose="02020603050405020304" pitchFamily="18" charset="0"/>
+              </a:rPr>
+              <a:t>Express the sinusoidal voltage equation.</a:t>
+            </a:r>
+          </a:p>
+          <a:p>
+            <a:pPr algn="r"/>
+            <a:r>
+              <a:rPr lang="en-US" dirty="0">
+                <a:latin typeface="Times New Roman" panose="02020603050405020304" pitchFamily="18" charset="0"/>
+                <a:cs typeface="Times New Roman" panose="02020603050405020304" pitchFamily="18" charset="0"/>
+              </a:rPr>
+              <a:t>[4 marks]</a:t>
+            </a:r>
+          </a:p>
+        </p:txBody>
+      </p:sp>
+      <p:sp>
+        <p:nvSpPr>
+          <p:cNvPr id="9" name="TextBox 8">
+            <a:extLst>
+              <a:ext uri="{FF2B5EF4-FFF2-40B4-BE49-F238E27FC236}">
+                <a16:creationId xmlns:a16="http://schemas.microsoft.com/office/drawing/2014/main" id="{CCE42601-D63F-C39E-BD1C-F17D671240FF}"/>
+              </a:ext>
+            </a:extLst>
+          </p:cNvPr>
+          <p:cNvSpPr txBox="1"/>
+          <p:nvPr/>
+        </p:nvSpPr>
+        <p:spPr>
+          <a:xfrm>
+            <a:off x="3049731" y="2274838"/>
+            <a:ext cx="8681027" cy="1754326"/>
+          </a:xfrm>
+          <a:prstGeom prst="rect">
+            <a:avLst/>
+          </a:prstGeom>
+          <a:noFill/>
+        </p:spPr>
+        <p:txBody>
+          <a:bodyPr wrap="square">
+            <a:spAutoFit/>
+          </a:bodyPr>
+          <a:lstStyle/>
+          <a:p>
+            <a:pPr>
+              <a:buNone/>
+            </a:pPr>
+            <a:r>
+              <a:rPr lang="en-US" b="1" dirty="0">
+                <a:latin typeface="Times New Roman" panose="02020603050405020304" pitchFamily="18" charset="0"/>
+                <a:cs typeface="Times New Roman" panose="02020603050405020304" pitchFamily="18" charset="0"/>
+              </a:rPr>
+              <a:t>b) FIGURE 5b</a:t>
+            </a:r>
+            <a:r>
+              <a:rPr lang="en-US" dirty="0">
+                <a:latin typeface="Times New Roman" panose="02020603050405020304" pitchFamily="18" charset="0"/>
+                <a:cs typeface="Times New Roman" panose="02020603050405020304" pitchFamily="18" charset="0"/>
+              </a:rPr>
+              <a:t> shows the values of root means square voltage across the resistor R, inductor, L and capacitor, C. Calculate the</a:t>
+            </a:r>
+          </a:p>
+          <a:p>
+            <a:pPr>
+              <a:buNone/>
+            </a:pPr>
+            <a:r>
+              <a:rPr lang="en-US" dirty="0" err="1">
+                <a:latin typeface="Times New Roman" panose="02020603050405020304" pitchFamily="18" charset="0"/>
+                <a:cs typeface="Times New Roman" panose="02020603050405020304" pitchFamily="18" charset="0"/>
+              </a:rPr>
+              <a:t>i</a:t>
+            </a:r>
+            <a:r>
+              <a:rPr lang="en-US" dirty="0">
+                <a:latin typeface="Times New Roman" panose="02020603050405020304" pitchFamily="18" charset="0"/>
+                <a:cs typeface="Times New Roman" panose="02020603050405020304" pitchFamily="18" charset="0"/>
+              </a:rPr>
+              <a:t>) source voltage and phase angle of the source voltage with respect to the current. Does the source voltage lag or lead the current?</a:t>
+            </a:r>
+          </a:p>
+          <a:p>
+            <a:pPr>
+              <a:buNone/>
+            </a:pPr>
+            <a:r>
+              <a:rPr lang="en-US" dirty="0">
+                <a:latin typeface="Times New Roman" panose="02020603050405020304" pitchFamily="18" charset="0"/>
+                <a:cs typeface="Times New Roman" panose="02020603050405020304" pitchFamily="18" charset="0"/>
+              </a:rPr>
+              <a:t>ii) power factor of the circuit.</a:t>
+            </a:r>
+          </a:p>
+          <a:p>
+            <a:pPr algn="r">
+              <a:buNone/>
+            </a:pPr>
+            <a:r>
+              <a:rPr lang="en-US" dirty="0">
+                <a:latin typeface="Times New Roman" panose="02020603050405020304" pitchFamily="18" charset="0"/>
+                <a:cs typeface="Times New Roman" panose="02020603050405020304" pitchFamily="18" charset="0"/>
+              </a:rPr>
+              <a:t>[6 marks]</a:t>
+            </a:r>
+          </a:p>
+        </p:txBody>
+      </p:sp>
+      <p:pic>
+        <p:nvPicPr>
+          <p:cNvPr id="13" name="Picture 12">
+            <a:extLst>
+              <a:ext uri="{FF2B5EF4-FFF2-40B4-BE49-F238E27FC236}">
+                <a16:creationId xmlns:a16="http://schemas.microsoft.com/office/drawing/2014/main" id="{248B4353-2258-D432-9DC3-58DAB430F769}"/>
+              </a:ext>
+            </a:extLst>
+          </p:cNvPr>
+          <p:cNvPicPr>
+            <a:picLocks noChangeAspect="1"/>
+          </p:cNvPicPr>
+          <p:nvPr/>
+        </p:nvPicPr>
+        <p:blipFill>
+          <a:blip r:embed="rId4"/>
+          <a:stretch>
+            <a:fillRect/>
+          </a:stretch>
+        </p:blipFill>
+        <p:spPr>
+          <a:xfrm>
+            <a:off x="7285940" y="4587955"/>
+            <a:ext cx="4906060" cy="924054"/>
+          </a:xfrm>
+          <a:prstGeom prst="rect">
+            <a:avLst/>
+          </a:prstGeom>
+        </p:spPr>
+      </p:pic>
+    </p:spTree>
+    <p:extLst>
+      <p:ext uri="{BB962C8B-B14F-4D97-AF65-F5344CB8AC3E}">
+        <p14:creationId xmlns:p14="http://schemas.microsoft.com/office/powerpoint/2010/main" val="166010882"/>
+      </p:ext>
+    </p:extLst>
+  </p:cSld>
+  <p:clrMapOvr>
+    <a:masterClrMapping/>
+  </p:clrMapOvr>
+</p:sld>
+</file>
+
+<file path=ppt/slides/slide6.xml><?xml version="1.0" encoding="utf-8"?>
+<p:sld xmlns:a="http://schemas.openxmlformats.org/drawingml/2006/main" xmlns:r="http://schemas.openxmlformats.org/officeDocument/2006/relationships" xmlns:p="http://schemas.openxmlformats.org/presentationml/2006/main">
+  <p:cSld>
+    <p:spTree>
+      <p:nvGrpSpPr>
+        <p:cNvPr id="1" name=""/>
+        <p:cNvGrpSpPr/>
+        <p:nvPr/>
+      </p:nvGrpSpPr>
+      <p:grpSpPr>
+        <a:xfrm>
+          <a:off x="0" y="0"/>
+          <a:ext cx="0" cy="0"/>
+          <a:chOff x="0" y="0"/>
+          <a:chExt cx="0" cy="0"/>
+        </a:xfrm>
+      </p:grpSpPr>
+      <p:sp>
+        <p:nvSpPr>
+          <p:cNvPr id="3" name="TextBox 2">
+            <a:extLst>
+              <a:ext uri="{FF2B5EF4-FFF2-40B4-BE49-F238E27FC236}">
+                <a16:creationId xmlns:a16="http://schemas.microsoft.com/office/drawing/2014/main" id="{DF257762-BC1D-C931-26E2-F9D0A0AADA4A}"/>
+              </a:ext>
+            </a:extLst>
+          </p:cNvPr>
+          <p:cNvSpPr txBox="1"/>
+          <p:nvPr/>
+        </p:nvSpPr>
+        <p:spPr>
+          <a:xfrm>
+            <a:off x="788068" y="422521"/>
+            <a:ext cx="11051006" cy="1754326"/>
+          </a:xfrm>
+          <a:prstGeom prst="rect">
+            <a:avLst/>
+          </a:prstGeom>
+          <a:noFill/>
+        </p:spPr>
+        <p:txBody>
+          <a:bodyPr wrap="square">
+            <a:spAutoFit/>
+          </a:bodyPr>
+          <a:lstStyle/>
+          <a:p>
+            <a:r>
+              <a:rPr lang="en-US" b="1" dirty="0">
+                <a:latin typeface="Times New Roman" panose="02020603050405020304" pitchFamily="18" charset="0"/>
+                <a:cs typeface="Times New Roman" panose="02020603050405020304" pitchFamily="18" charset="0"/>
+              </a:rPr>
+              <a:t>5. a)</a:t>
+            </a:r>
+            <a:r>
+              <a:rPr lang="en-US" dirty="0">
+                <a:latin typeface="Times New Roman" panose="02020603050405020304" pitchFamily="18" charset="0"/>
+                <a:cs typeface="Times New Roman" panose="02020603050405020304" pitchFamily="18" charset="0"/>
+              </a:rPr>
+              <a:t> An AC source has an output voltage of </a:t>
+            </a:r>
+            <a:r>
+              <a:rPr lang="en-US" i="1" dirty="0">
+                <a:latin typeface="Times New Roman" panose="02020603050405020304" pitchFamily="18" charset="0"/>
+                <a:cs typeface="Times New Roman" panose="02020603050405020304" pitchFamily="18" charset="0"/>
+              </a:rPr>
+              <a:t>V</a:t>
+            </a:r>
+            <a:r>
+              <a:rPr lang="en-US" dirty="0">
+                <a:latin typeface="Times New Roman" panose="02020603050405020304" pitchFamily="18" charset="0"/>
+                <a:cs typeface="Times New Roman" panose="02020603050405020304" pitchFamily="18" charset="0"/>
+              </a:rPr>
+              <a:t> = 300 sin 100 π</a:t>
+            </a:r>
+            <a:r>
+              <a:rPr lang="en-US" i="1" dirty="0">
+                <a:latin typeface="Times New Roman" panose="02020603050405020304" pitchFamily="18" charset="0"/>
+                <a:cs typeface="Times New Roman" panose="02020603050405020304" pitchFamily="18" charset="0"/>
+              </a:rPr>
+              <a:t>t</a:t>
+            </a:r>
+            <a:r>
+              <a:rPr lang="en-US" dirty="0">
+                <a:latin typeface="Times New Roman" panose="02020603050405020304" pitchFamily="18" charset="0"/>
+                <a:cs typeface="Times New Roman" panose="02020603050405020304" pitchFamily="18" charset="0"/>
+              </a:rPr>
+              <a:t>. The source is connected to a 1.20 H inductor. Calculate the: </a:t>
+            </a:r>
+          </a:p>
+          <a:p>
+            <a:pPr marL="400050" indent="-400050">
+              <a:buAutoNum type="romanLcParenR"/>
+            </a:pPr>
+            <a:r>
+              <a:rPr lang="en-US" dirty="0">
+                <a:latin typeface="Times New Roman" panose="02020603050405020304" pitchFamily="18" charset="0"/>
+                <a:cs typeface="Times New Roman" panose="02020603050405020304" pitchFamily="18" charset="0"/>
+              </a:rPr>
+              <a:t>rms voltage </a:t>
+            </a:r>
+          </a:p>
+          <a:p>
+            <a:pPr marL="400050" indent="-400050">
+              <a:buAutoNum type="romanLcParenR"/>
+            </a:pPr>
+            <a:r>
+              <a:rPr lang="en-US" dirty="0">
+                <a:latin typeface="Times New Roman" panose="02020603050405020304" pitchFamily="18" charset="0"/>
+                <a:cs typeface="Times New Roman" panose="02020603050405020304" pitchFamily="18" charset="0"/>
+              </a:rPr>
+              <a:t>rms current in the inductor </a:t>
+            </a:r>
+          </a:p>
+          <a:p>
+            <a:pPr marL="400050" indent="-400050">
+              <a:buAutoNum type="romanLcParenR"/>
+            </a:pPr>
+            <a:r>
+              <a:rPr lang="en-US" dirty="0">
+                <a:latin typeface="Times New Roman" panose="02020603050405020304" pitchFamily="18" charset="0"/>
+                <a:cs typeface="Times New Roman" panose="02020603050405020304" pitchFamily="18" charset="0"/>
+              </a:rPr>
+              <a:t> average power </a:t>
+            </a:r>
+          </a:p>
+          <a:p>
+            <a:pPr algn="r"/>
+            <a:r>
+              <a:rPr lang="en-US" dirty="0">
+                <a:latin typeface="Times New Roman" panose="02020603050405020304" pitchFamily="18" charset="0"/>
+                <a:cs typeface="Times New Roman" panose="02020603050405020304" pitchFamily="18" charset="0"/>
+              </a:rPr>
+              <a:t>[5 marks]</a:t>
+            </a:r>
+            <a:endParaRPr lang="en-MY" dirty="0">
+              <a:latin typeface="Times New Roman" panose="02020603050405020304" pitchFamily="18" charset="0"/>
+              <a:cs typeface="Times New Roman" panose="02020603050405020304" pitchFamily="18" charset="0"/>
+            </a:endParaRPr>
+          </a:p>
+        </p:txBody>
+      </p:sp>
+      <p:sp>
+        <p:nvSpPr>
+          <p:cNvPr id="5" name="TextBox 4">
+            <a:extLst>
+              <a:ext uri="{FF2B5EF4-FFF2-40B4-BE49-F238E27FC236}">
+                <a16:creationId xmlns:a16="http://schemas.microsoft.com/office/drawing/2014/main" id="{003B56FF-A154-A01A-FD0C-A9C7B2812EFB}"/>
+              </a:ext>
+            </a:extLst>
+          </p:cNvPr>
+          <p:cNvSpPr txBox="1"/>
+          <p:nvPr/>
+        </p:nvSpPr>
+        <p:spPr>
+          <a:xfrm>
+            <a:off x="788068" y="2594084"/>
+            <a:ext cx="11051006" cy="1754326"/>
+          </a:xfrm>
+          <a:prstGeom prst="rect">
+            <a:avLst/>
+          </a:prstGeom>
+          <a:noFill/>
+        </p:spPr>
+        <p:txBody>
+          <a:bodyPr wrap="square">
+            <a:spAutoFit/>
+          </a:bodyPr>
+          <a:lstStyle/>
+          <a:p>
+            <a:r>
+              <a:rPr lang="en-US" b="1" dirty="0">
+                <a:latin typeface="Times New Roman" panose="02020603050405020304" pitchFamily="18" charset="0"/>
+                <a:cs typeface="Times New Roman" panose="02020603050405020304" pitchFamily="18" charset="0"/>
+              </a:rPr>
+              <a:t>b)</a:t>
+            </a:r>
+            <a:r>
+              <a:rPr lang="en-US" dirty="0">
+                <a:latin typeface="Times New Roman" panose="02020603050405020304" pitchFamily="18" charset="0"/>
+                <a:cs typeface="Times New Roman" panose="02020603050405020304" pitchFamily="18" charset="0"/>
+              </a:rPr>
+              <a:t> An AC source that has a peak voltage of 120 V and a frequency of 50.0 Hz is connected in series to a 900 Ω resistor, a 2.40 H inductor and a 10.0 </a:t>
+            </a:r>
+            <a:r>
+              <a:rPr lang="en-US" dirty="0" err="1">
+                <a:latin typeface="Times New Roman" panose="02020603050405020304" pitchFamily="18" charset="0"/>
+                <a:cs typeface="Times New Roman" panose="02020603050405020304" pitchFamily="18" charset="0"/>
+              </a:rPr>
+              <a:t>μF</a:t>
+            </a:r>
+            <a:r>
+              <a:rPr lang="en-US" dirty="0">
+                <a:latin typeface="Times New Roman" panose="02020603050405020304" pitchFamily="18" charset="0"/>
+                <a:cs typeface="Times New Roman" panose="02020603050405020304" pitchFamily="18" charset="0"/>
+              </a:rPr>
+              <a:t> capacitor. Calculate the: </a:t>
+            </a:r>
+          </a:p>
+          <a:p>
+            <a:pPr marL="400050" indent="-400050">
+              <a:buAutoNum type="romanLcParenR"/>
+            </a:pPr>
+            <a:r>
+              <a:rPr lang="en-US" dirty="0">
+                <a:latin typeface="Times New Roman" panose="02020603050405020304" pitchFamily="18" charset="0"/>
+                <a:cs typeface="Times New Roman" panose="02020603050405020304" pitchFamily="18" charset="0"/>
+              </a:rPr>
+              <a:t>impedance of the circuit </a:t>
+            </a:r>
+          </a:p>
+          <a:p>
+            <a:pPr marL="400050" indent="-400050">
+              <a:buAutoNum type="romanLcParenR"/>
+            </a:pPr>
+            <a:r>
+              <a:rPr lang="en-US" dirty="0">
+                <a:latin typeface="Times New Roman" panose="02020603050405020304" pitchFamily="18" charset="0"/>
+                <a:cs typeface="Times New Roman" panose="02020603050405020304" pitchFamily="18" charset="0"/>
+              </a:rPr>
+              <a:t>phase angle of the circuit </a:t>
+            </a:r>
+          </a:p>
+          <a:p>
+            <a:pPr marL="400050" indent="-400050">
+              <a:buAutoNum type="romanLcParenR"/>
+            </a:pPr>
+            <a:r>
+              <a:rPr lang="en-US" dirty="0">
+                <a:latin typeface="Times New Roman" panose="02020603050405020304" pitchFamily="18" charset="0"/>
+                <a:cs typeface="Times New Roman" panose="02020603050405020304" pitchFamily="18" charset="0"/>
+              </a:rPr>
+              <a:t>the power factor of the circuit </a:t>
+            </a:r>
+          </a:p>
+          <a:p>
+            <a:pPr algn="r"/>
+            <a:r>
+              <a:rPr lang="en-US" dirty="0">
+                <a:latin typeface="Times New Roman" panose="02020603050405020304" pitchFamily="18" charset="0"/>
+                <a:cs typeface="Times New Roman" panose="02020603050405020304" pitchFamily="18" charset="0"/>
+              </a:rPr>
+              <a:t>[5 marks]</a:t>
+            </a:r>
+            <a:endParaRPr lang="en-MY" dirty="0">
+              <a:latin typeface="Times New Roman" panose="02020603050405020304" pitchFamily="18" charset="0"/>
+              <a:cs typeface="Times New Roman" panose="02020603050405020304" pitchFamily="18" charset="0"/>
+            </a:endParaRPr>
+          </a:p>
+        </p:txBody>
+      </p:sp>
+      <p:pic>
+        <p:nvPicPr>
+          <p:cNvPr id="4" name="Picture 3">
+            <a:extLst>
+              <a:ext uri="{FF2B5EF4-FFF2-40B4-BE49-F238E27FC236}">
+                <a16:creationId xmlns:a16="http://schemas.microsoft.com/office/drawing/2014/main" id="{0AD4BF58-9669-3AF2-D372-34306B49B487}"/>
+              </a:ext>
+            </a:extLst>
+          </p:cNvPr>
+          <p:cNvPicPr>
+            <a:picLocks noChangeAspect="1"/>
+          </p:cNvPicPr>
+          <p:nvPr/>
+        </p:nvPicPr>
+        <p:blipFill>
+          <a:blip r:embed="rId2"/>
+          <a:stretch>
+            <a:fillRect/>
+          </a:stretch>
+        </p:blipFill>
+        <p:spPr>
+          <a:xfrm>
+            <a:off x="9048311" y="5701512"/>
+            <a:ext cx="3143689" cy="1095528"/>
+          </a:xfrm>
+          <a:prstGeom prst="rect">
+            <a:avLst/>
+          </a:prstGeom>
+        </p:spPr>
+      </p:pic>
+    </p:spTree>
+    <p:extLst>
+      <p:ext uri="{BB962C8B-B14F-4D97-AF65-F5344CB8AC3E}">
+        <p14:creationId xmlns:p14="http://schemas.microsoft.com/office/powerpoint/2010/main" val="2356471832"/>
+      </p:ext>
+    </p:extLst>
+  </p:cSld>
+  <p:clrMapOvr>
+    <a:masterClrMapping/>
+  </p:clrMapOvr>
+</p:sld>
+</file>
+
+<file path=ppt/slides/slide7.xml><?xml version="1.0" encoding="utf-8"?>
+<p:sld xmlns:a="http://schemas.openxmlformats.org/drawingml/2006/main" xmlns:r="http://schemas.openxmlformats.org/officeDocument/2006/relationships" xmlns:p="http://schemas.openxmlformats.org/presentationml/2006/main">
+  <p:cSld>
+    <p:spTree>
+      <p:nvGrpSpPr>
+        <p:cNvPr id="1" name=""/>
+        <p:cNvGrpSpPr/>
+        <p:nvPr/>
+      </p:nvGrpSpPr>
+      <p:grpSpPr>
+        <a:xfrm>
+          <a:off x="0" y="0"/>
+          <a:ext cx="0" cy="0"/>
+          <a:chOff x="0" y="0"/>
+          <a:chExt cx="0" cy="0"/>
+        </a:xfrm>
+      </p:grpSpPr>
+      <p:sp>
+        <p:nvSpPr>
+          <p:cNvPr id="3" name="TextBox 2">
+            <a:extLst>
+              <a:ext uri="{FF2B5EF4-FFF2-40B4-BE49-F238E27FC236}">
+                <a16:creationId xmlns:a16="http://schemas.microsoft.com/office/drawing/2014/main" id="{6EBBDB45-7D5F-6F32-0BF6-383E664F76D4}"/>
+              </a:ext>
+            </a:extLst>
+          </p:cNvPr>
+          <p:cNvSpPr txBox="1"/>
+          <p:nvPr/>
+        </p:nvSpPr>
+        <p:spPr>
+          <a:xfrm>
+            <a:off x="943897" y="545691"/>
+            <a:ext cx="9748684" cy="3034164"/>
+          </a:xfrm>
+          <a:prstGeom prst="rect">
+            <a:avLst/>
+          </a:prstGeom>
+          <a:noFill/>
+        </p:spPr>
+        <p:txBody>
+          <a:bodyPr wrap="square">
+            <a:spAutoFit/>
+          </a:bodyPr>
+          <a:lstStyle/>
+          <a:p>
+            <a:pPr marR="11430" lvl="0">
+              <a:lnSpc>
+                <a:spcPct val="150000"/>
+              </a:lnSpc>
+              <a:spcBef>
+                <a:spcPts val="500"/>
+              </a:spcBef>
+              <a:tabLst>
+                <a:tab pos="554355" algn="l"/>
+              </a:tabLst>
+            </a:pPr>
+            <a:r>
+              <a:rPr lang="en-US" spc="0" dirty="0">
+                <a:effectLst/>
+                <a:latin typeface="Times New Roman" panose="02020603050405020304" pitchFamily="18" charset="0"/>
+                <a:ea typeface="Times New Roman" panose="02020603050405020304" pitchFamily="18" charset="0"/>
+              </a:rPr>
+              <a:t>5  An</a:t>
+            </a:r>
+            <a:r>
+              <a:rPr lang="en-US" spc="-10" dirty="0">
+                <a:effectLst/>
+                <a:latin typeface="Times New Roman" panose="02020603050405020304" pitchFamily="18" charset="0"/>
+                <a:ea typeface="Times New Roman" panose="02020603050405020304" pitchFamily="18" charset="0"/>
+              </a:rPr>
+              <a:t> </a:t>
+            </a:r>
+            <a:r>
+              <a:rPr lang="en-US" spc="0" dirty="0">
+                <a:effectLst/>
+                <a:latin typeface="Times New Roman" panose="02020603050405020304" pitchFamily="18" charset="0"/>
+                <a:ea typeface="Times New Roman" panose="02020603050405020304" pitchFamily="18" charset="0"/>
+              </a:rPr>
+              <a:t>AC</a:t>
+            </a:r>
+            <a:r>
+              <a:rPr lang="en-US" spc="-5" dirty="0">
+                <a:effectLst/>
+                <a:latin typeface="Times New Roman" panose="02020603050405020304" pitchFamily="18" charset="0"/>
+                <a:ea typeface="Times New Roman" panose="02020603050405020304" pitchFamily="18" charset="0"/>
+              </a:rPr>
+              <a:t> </a:t>
+            </a:r>
+            <a:r>
+              <a:rPr lang="en-US" spc="0" dirty="0">
+                <a:effectLst/>
+                <a:latin typeface="Times New Roman" panose="02020603050405020304" pitchFamily="18" charset="0"/>
+                <a:ea typeface="Times New Roman" panose="02020603050405020304" pitchFamily="18" charset="0"/>
+              </a:rPr>
+              <a:t>source</a:t>
+            </a:r>
+            <a:r>
+              <a:rPr lang="en-US" spc="-10" dirty="0">
+                <a:effectLst/>
+                <a:latin typeface="Times New Roman" panose="02020603050405020304" pitchFamily="18" charset="0"/>
+                <a:ea typeface="Times New Roman" panose="02020603050405020304" pitchFamily="18" charset="0"/>
+              </a:rPr>
+              <a:t> </a:t>
+            </a:r>
+            <a:r>
+              <a:rPr lang="en-US" spc="0" dirty="0">
+                <a:effectLst/>
+                <a:latin typeface="Times New Roman" panose="02020603050405020304" pitchFamily="18" charset="0"/>
+                <a:ea typeface="Times New Roman" panose="02020603050405020304" pitchFamily="18" charset="0"/>
+              </a:rPr>
+              <a:t>of</a:t>
+            </a:r>
+            <a:r>
+              <a:rPr lang="en-US" spc="-10" dirty="0">
+                <a:effectLst/>
+                <a:latin typeface="Times New Roman" panose="02020603050405020304" pitchFamily="18" charset="0"/>
+                <a:ea typeface="Times New Roman" panose="02020603050405020304" pitchFamily="18" charset="0"/>
+              </a:rPr>
+              <a:t> </a:t>
+            </a:r>
+            <a:r>
+              <a:rPr lang="en-US" spc="0" dirty="0">
+                <a:effectLst/>
+                <a:latin typeface="Times New Roman" panose="02020603050405020304" pitchFamily="18" charset="0"/>
+                <a:ea typeface="Times New Roman" panose="02020603050405020304" pitchFamily="18" charset="0"/>
+              </a:rPr>
+              <a:t>10</a:t>
+            </a:r>
+            <a:r>
+              <a:rPr lang="en-US" spc="-5" dirty="0">
+                <a:effectLst/>
+                <a:latin typeface="Times New Roman" panose="02020603050405020304" pitchFamily="18" charset="0"/>
+                <a:ea typeface="Times New Roman" panose="02020603050405020304" pitchFamily="18" charset="0"/>
+              </a:rPr>
+              <a:t> </a:t>
+            </a:r>
+            <a:r>
+              <a:rPr lang="en-US" spc="0" dirty="0">
+                <a:effectLst/>
+                <a:latin typeface="Times New Roman" panose="02020603050405020304" pitchFamily="18" charset="0"/>
+                <a:ea typeface="Times New Roman" panose="02020603050405020304" pitchFamily="18" charset="0"/>
+              </a:rPr>
+              <a:t>V</a:t>
+            </a:r>
+            <a:r>
+              <a:rPr lang="en-US" spc="-10" dirty="0">
+                <a:effectLst/>
+                <a:latin typeface="Times New Roman" panose="02020603050405020304" pitchFamily="18" charset="0"/>
+                <a:ea typeface="Times New Roman" panose="02020603050405020304" pitchFamily="18" charset="0"/>
+              </a:rPr>
+              <a:t> </a:t>
+            </a:r>
+            <a:r>
+              <a:rPr lang="en-US" spc="0" dirty="0">
+                <a:effectLst/>
+                <a:latin typeface="Times New Roman" panose="02020603050405020304" pitchFamily="18" charset="0"/>
+                <a:ea typeface="Times New Roman" panose="02020603050405020304" pitchFamily="18" charset="0"/>
+              </a:rPr>
+              <a:t>and</a:t>
+            </a:r>
+            <a:r>
+              <a:rPr lang="en-US" spc="-5" dirty="0">
+                <a:effectLst/>
+                <a:latin typeface="Times New Roman" panose="02020603050405020304" pitchFamily="18" charset="0"/>
+                <a:ea typeface="Times New Roman" panose="02020603050405020304" pitchFamily="18" charset="0"/>
+              </a:rPr>
+              <a:t> </a:t>
+            </a:r>
+            <a:r>
+              <a:rPr lang="en-US" spc="0" dirty="0">
+                <a:effectLst/>
+                <a:latin typeface="Times New Roman" panose="02020603050405020304" pitchFamily="18" charset="0"/>
+                <a:ea typeface="Times New Roman" panose="02020603050405020304" pitchFamily="18" charset="0"/>
+              </a:rPr>
+              <a:t>frequency</a:t>
+            </a:r>
+            <a:r>
+              <a:rPr lang="en-US" spc="-5" dirty="0">
+                <a:effectLst/>
+                <a:latin typeface="Times New Roman" panose="02020603050405020304" pitchFamily="18" charset="0"/>
+                <a:ea typeface="Times New Roman" panose="02020603050405020304" pitchFamily="18" charset="0"/>
+              </a:rPr>
+              <a:t> </a:t>
+            </a:r>
+            <a:r>
+              <a:rPr lang="en-US" spc="0" dirty="0">
+                <a:effectLst/>
+                <a:latin typeface="Times New Roman" panose="02020603050405020304" pitchFamily="18" charset="0"/>
+                <a:ea typeface="Times New Roman" panose="02020603050405020304" pitchFamily="18" charset="0"/>
+              </a:rPr>
+              <a:t>50</a:t>
+            </a:r>
+            <a:r>
+              <a:rPr lang="en-US" spc="-5" dirty="0">
+                <a:effectLst/>
+                <a:latin typeface="Times New Roman" panose="02020603050405020304" pitchFamily="18" charset="0"/>
+                <a:ea typeface="Times New Roman" panose="02020603050405020304" pitchFamily="18" charset="0"/>
+              </a:rPr>
+              <a:t> </a:t>
+            </a:r>
+            <a:r>
+              <a:rPr lang="en-US" spc="0" dirty="0">
+                <a:effectLst/>
+                <a:latin typeface="Times New Roman" panose="02020603050405020304" pitchFamily="18" charset="0"/>
+                <a:ea typeface="Times New Roman" panose="02020603050405020304" pitchFamily="18" charset="0"/>
+              </a:rPr>
+              <a:t>Hz</a:t>
+            </a:r>
+            <a:r>
+              <a:rPr lang="en-US" spc="-15" dirty="0">
+                <a:effectLst/>
+                <a:latin typeface="Times New Roman" panose="02020603050405020304" pitchFamily="18" charset="0"/>
+                <a:ea typeface="Times New Roman" panose="02020603050405020304" pitchFamily="18" charset="0"/>
+              </a:rPr>
+              <a:t> </a:t>
+            </a:r>
+            <a:r>
+              <a:rPr lang="en-US" spc="0" dirty="0">
+                <a:effectLst/>
+                <a:latin typeface="Times New Roman" panose="02020603050405020304" pitchFamily="18" charset="0"/>
+                <a:ea typeface="Times New Roman" panose="02020603050405020304" pitchFamily="18" charset="0"/>
+              </a:rPr>
+              <a:t>is</a:t>
+            </a:r>
+            <a:r>
+              <a:rPr lang="en-US" spc="-5" dirty="0">
+                <a:effectLst/>
+                <a:latin typeface="Times New Roman" panose="02020603050405020304" pitchFamily="18" charset="0"/>
+                <a:ea typeface="Times New Roman" panose="02020603050405020304" pitchFamily="18" charset="0"/>
+              </a:rPr>
+              <a:t> </a:t>
+            </a:r>
+            <a:r>
+              <a:rPr lang="en-US" spc="0" dirty="0">
+                <a:effectLst/>
+                <a:latin typeface="Times New Roman" panose="02020603050405020304" pitchFamily="18" charset="0"/>
+                <a:ea typeface="Times New Roman" panose="02020603050405020304" pitchFamily="18" charset="0"/>
+              </a:rPr>
+              <a:t>connected</a:t>
+            </a:r>
+            <a:r>
+              <a:rPr lang="en-US" spc="-10" dirty="0">
+                <a:effectLst/>
+                <a:latin typeface="Times New Roman" panose="02020603050405020304" pitchFamily="18" charset="0"/>
+                <a:ea typeface="Times New Roman" panose="02020603050405020304" pitchFamily="18" charset="0"/>
+              </a:rPr>
+              <a:t> </a:t>
+            </a:r>
+            <a:r>
+              <a:rPr lang="en-US" spc="0" dirty="0">
+                <a:effectLst/>
+                <a:latin typeface="Times New Roman" panose="02020603050405020304" pitchFamily="18" charset="0"/>
+                <a:ea typeface="Times New Roman" panose="02020603050405020304" pitchFamily="18" charset="0"/>
+              </a:rPr>
+              <a:t>to</a:t>
+            </a:r>
+            <a:r>
+              <a:rPr lang="en-US" spc="-5" dirty="0">
+                <a:effectLst/>
+                <a:latin typeface="Times New Roman" panose="02020603050405020304" pitchFamily="18" charset="0"/>
+                <a:ea typeface="Times New Roman" panose="02020603050405020304" pitchFamily="18" charset="0"/>
+              </a:rPr>
+              <a:t> </a:t>
+            </a:r>
+            <a:r>
+              <a:rPr lang="en-US" spc="0" dirty="0">
+                <a:effectLst/>
+                <a:latin typeface="Times New Roman" panose="02020603050405020304" pitchFamily="18" charset="0"/>
+                <a:ea typeface="Times New Roman" panose="02020603050405020304" pitchFamily="18" charset="0"/>
+              </a:rPr>
+              <a:t>a</a:t>
+            </a:r>
+            <a:r>
+              <a:rPr lang="en-US" spc="-10" dirty="0">
+                <a:effectLst/>
+                <a:latin typeface="Times New Roman" panose="02020603050405020304" pitchFamily="18" charset="0"/>
+                <a:ea typeface="Times New Roman" panose="02020603050405020304" pitchFamily="18" charset="0"/>
+              </a:rPr>
+              <a:t> </a:t>
+            </a:r>
+            <a:r>
+              <a:rPr lang="en-US" spc="0" dirty="0">
+                <a:effectLst/>
+                <a:latin typeface="Times New Roman" panose="02020603050405020304" pitchFamily="18" charset="0"/>
+                <a:ea typeface="Times New Roman" panose="02020603050405020304" pitchFamily="18" charset="0"/>
+              </a:rPr>
+              <a:t>circuit</a:t>
+            </a:r>
+            <a:r>
+              <a:rPr lang="en-US" spc="-5" dirty="0">
+                <a:effectLst/>
+                <a:latin typeface="Times New Roman" panose="02020603050405020304" pitchFamily="18" charset="0"/>
+                <a:ea typeface="Times New Roman" panose="02020603050405020304" pitchFamily="18" charset="0"/>
+              </a:rPr>
+              <a:t> </a:t>
+            </a:r>
+            <a:r>
+              <a:rPr lang="en-US" spc="0" dirty="0">
+                <a:effectLst/>
+                <a:latin typeface="Times New Roman" panose="02020603050405020304" pitchFamily="18" charset="0"/>
+                <a:ea typeface="Times New Roman" panose="02020603050405020304" pitchFamily="18" charset="0"/>
+              </a:rPr>
+              <a:t>which</a:t>
+            </a:r>
+            <a:r>
+              <a:rPr lang="en-US" spc="-5" dirty="0">
+                <a:effectLst/>
+                <a:latin typeface="Times New Roman" panose="02020603050405020304" pitchFamily="18" charset="0"/>
+                <a:ea typeface="Times New Roman" panose="02020603050405020304" pitchFamily="18" charset="0"/>
+              </a:rPr>
+              <a:t> </a:t>
+            </a:r>
+            <a:r>
+              <a:rPr lang="en-US" spc="0" dirty="0">
+                <a:effectLst/>
+                <a:latin typeface="Times New Roman" panose="02020603050405020304" pitchFamily="18" charset="0"/>
+                <a:ea typeface="Times New Roman" panose="02020603050405020304" pitchFamily="18" charset="0"/>
+              </a:rPr>
+              <a:t>consists</a:t>
+            </a:r>
+            <a:r>
+              <a:rPr lang="en-US" spc="-5" dirty="0">
+                <a:effectLst/>
+                <a:latin typeface="Times New Roman" panose="02020603050405020304" pitchFamily="18" charset="0"/>
+                <a:ea typeface="Times New Roman" panose="02020603050405020304" pitchFamily="18" charset="0"/>
+              </a:rPr>
+              <a:t> </a:t>
+            </a:r>
+            <a:r>
+              <a:rPr lang="en-US" spc="0" dirty="0">
+                <a:effectLst/>
+                <a:latin typeface="Times New Roman" panose="02020603050405020304" pitchFamily="18" charset="0"/>
+                <a:ea typeface="Times New Roman" panose="02020603050405020304" pitchFamily="18" charset="0"/>
+              </a:rPr>
+              <a:t>of an inductor of inductance 2 H and a resistor of 1 </a:t>
+            </a:r>
+            <a:r>
+              <a:rPr lang="en-US" spc="0" dirty="0" err="1">
+                <a:effectLst/>
+                <a:latin typeface="Times New Roman" panose="02020603050405020304" pitchFamily="18" charset="0"/>
+                <a:ea typeface="Times New Roman" panose="02020603050405020304" pitchFamily="18" charset="0"/>
+              </a:rPr>
+              <a:t>k</a:t>
+            </a:r>
+            <a:r>
+              <a:rPr lang="en-US" spc="0" dirty="0" err="1">
+                <a:effectLst/>
+                <a:latin typeface="Cambria" panose="02040503050406030204" pitchFamily="18" charset="0"/>
+                <a:ea typeface="Times New Roman" panose="02020603050405020304" pitchFamily="18" charset="0"/>
+              </a:rPr>
+              <a:t>Ω</a:t>
+            </a:r>
+            <a:r>
+              <a:rPr lang="en-US" spc="0" dirty="0">
+                <a:effectLst/>
+                <a:latin typeface="Cambria" panose="02040503050406030204" pitchFamily="18" charset="0"/>
+                <a:ea typeface="Times New Roman" panose="02020603050405020304" pitchFamily="18" charset="0"/>
+              </a:rPr>
+              <a:t>. Find</a:t>
+            </a:r>
+            <a:endParaRPr lang="en-MY" spc="0" dirty="0">
+              <a:effectLst/>
+              <a:latin typeface="Times New Roman" panose="02020603050405020304" pitchFamily="18" charset="0"/>
+              <a:ea typeface="Times New Roman" panose="02020603050405020304" pitchFamily="18" charset="0"/>
+            </a:endParaRPr>
+          </a:p>
+          <a:p>
+            <a:pPr marL="742950" lvl="1" indent="-285750">
+              <a:lnSpc>
+                <a:spcPts val="1375"/>
+              </a:lnSpc>
+              <a:buFont typeface="+mj-lt"/>
+              <a:buAutoNum type="alphaLcPeriod"/>
+              <a:tabLst>
+                <a:tab pos="1003935" algn="l"/>
+              </a:tabLst>
+            </a:pPr>
+            <a:r>
+              <a:rPr lang="en-US" dirty="0">
+                <a:effectLst/>
+                <a:latin typeface="Times New Roman" panose="02020603050405020304" pitchFamily="18" charset="0"/>
+                <a:ea typeface="Times New Roman" panose="02020603050405020304" pitchFamily="18" charset="0"/>
+              </a:rPr>
+              <a:t>the</a:t>
+            </a:r>
+            <a:r>
+              <a:rPr lang="en-US" spc="-5" dirty="0">
+                <a:effectLst/>
+                <a:latin typeface="Times New Roman" panose="02020603050405020304" pitchFamily="18" charset="0"/>
+                <a:ea typeface="Times New Roman" panose="02020603050405020304" pitchFamily="18" charset="0"/>
+              </a:rPr>
+              <a:t> </a:t>
+            </a:r>
+            <a:r>
+              <a:rPr lang="en-US" dirty="0">
+                <a:effectLst/>
+                <a:latin typeface="Times New Roman" panose="02020603050405020304" pitchFamily="18" charset="0"/>
+                <a:ea typeface="Times New Roman" panose="02020603050405020304" pitchFamily="18" charset="0"/>
+              </a:rPr>
+              <a:t>current</a:t>
+            </a:r>
+            <a:r>
+              <a:rPr lang="en-US" spc="-5" dirty="0">
+                <a:effectLst/>
+                <a:latin typeface="Times New Roman" panose="02020603050405020304" pitchFamily="18" charset="0"/>
+                <a:ea typeface="Times New Roman" panose="02020603050405020304" pitchFamily="18" charset="0"/>
+              </a:rPr>
+              <a:t> </a:t>
+            </a:r>
+            <a:r>
+              <a:rPr lang="en-US" dirty="0">
+                <a:effectLst/>
+                <a:latin typeface="Times New Roman" panose="02020603050405020304" pitchFamily="18" charset="0"/>
+                <a:ea typeface="Times New Roman" panose="02020603050405020304" pitchFamily="18" charset="0"/>
+              </a:rPr>
+              <a:t>flows in</a:t>
+            </a:r>
+            <a:r>
+              <a:rPr lang="en-US" spc="-5" dirty="0">
+                <a:effectLst/>
+                <a:latin typeface="Times New Roman" panose="02020603050405020304" pitchFamily="18" charset="0"/>
+                <a:ea typeface="Times New Roman" panose="02020603050405020304" pitchFamily="18" charset="0"/>
+              </a:rPr>
+              <a:t> </a:t>
+            </a:r>
+            <a:r>
+              <a:rPr lang="en-US" dirty="0">
+                <a:effectLst/>
+                <a:latin typeface="Times New Roman" panose="02020603050405020304" pitchFamily="18" charset="0"/>
+                <a:ea typeface="Times New Roman" panose="02020603050405020304" pitchFamily="18" charset="0"/>
+              </a:rPr>
+              <a:t>the</a:t>
+            </a:r>
+            <a:r>
+              <a:rPr lang="en-US" spc="-5" dirty="0">
+                <a:effectLst/>
+                <a:latin typeface="Times New Roman" panose="02020603050405020304" pitchFamily="18" charset="0"/>
+                <a:ea typeface="Times New Roman" panose="02020603050405020304" pitchFamily="18" charset="0"/>
+              </a:rPr>
+              <a:t> </a:t>
+            </a:r>
+            <a:r>
+              <a:rPr lang="en-US" spc="-10" dirty="0">
+                <a:effectLst/>
+                <a:latin typeface="Times New Roman" panose="02020603050405020304" pitchFamily="18" charset="0"/>
+                <a:ea typeface="Times New Roman" panose="02020603050405020304" pitchFamily="18" charset="0"/>
+              </a:rPr>
+              <a:t>circuit.</a:t>
+            </a:r>
+            <a:endParaRPr lang="en-MY" dirty="0">
+              <a:effectLst/>
+              <a:latin typeface="Times New Roman" panose="02020603050405020304" pitchFamily="18" charset="0"/>
+              <a:ea typeface="Times New Roman" panose="02020603050405020304" pitchFamily="18" charset="0"/>
+            </a:endParaRPr>
+          </a:p>
+          <a:p>
+            <a:pPr marL="742950" lvl="1" indent="-285750">
+              <a:spcBef>
+                <a:spcPts val="695"/>
+              </a:spcBef>
+              <a:buFont typeface="+mj-lt"/>
+              <a:buAutoNum type="alphaLcPeriod"/>
+              <a:tabLst>
+                <a:tab pos="1003935" algn="l"/>
+              </a:tabLst>
+            </a:pPr>
+            <a:r>
+              <a:rPr lang="en-US" dirty="0">
+                <a:effectLst/>
+                <a:latin typeface="Times New Roman" panose="02020603050405020304" pitchFamily="18" charset="0"/>
+                <a:ea typeface="Times New Roman" panose="02020603050405020304" pitchFamily="18" charset="0"/>
+              </a:rPr>
+              <a:t>the</a:t>
+            </a:r>
+            <a:r>
+              <a:rPr lang="en-US" spc="-5" dirty="0">
+                <a:effectLst/>
+                <a:latin typeface="Times New Roman" panose="02020603050405020304" pitchFamily="18" charset="0"/>
+                <a:ea typeface="Times New Roman" panose="02020603050405020304" pitchFamily="18" charset="0"/>
+              </a:rPr>
+              <a:t> </a:t>
+            </a:r>
+            <a:r>
+              <a:rPr lang="en-US" dirty="0">
+                <a:effectLst/>
+                <a:latin typeface="Times New Roman" panose="02020603050405020304" pitchFamily="18" charset="0"/>
+                <a:ea typeface="Times New Roman" panose="02020603050405020304" pitchFamily="18" charset="0"/>
+              </a:rPr>
+              <a:t>voltage</a:t>
+            </a:r>
+            <a:r>
+              <a:rPr lang="en-US" spc="-10" dirty="0">
+                <a:effectLst/>
+                <a:latin typeface="Times New Roman" panose="02020603050405020304" pitchFamily="18" charset="0"/>
+                <a:ea typeface="Times New Roman" panose="02020603050405020304" pitchFamily="18" charset="0"/>
+              </a:rPr>
+              <a:t> </a:t>
+            </a:r>
+            <a:r>
+              <a:rPr lang="en-US" dirty="0">
+                <a:effectLst/>
+                <a:latin typeface="Times New Roman" panose="02020603050405020304" pitchFamily="18" charset="0"/>
+                <a:ea typeface="Times New Roman" panose="02020603050405020304" pitchFamily="18" charset="0"/>
+              </a:rPr>
+              <a:t>across</a:t>
+            </a:r>
+            <a:r>
+              <a:rPr lang="en-US" spc="-5" dirty="0">
+                <a:effectLst/>
+                <a:latin typeface="Times New Roman" panose="02020603050405020304" pitchFamily="18" charset="0"/>
+                <a:ea typeface="Times New Roman" panose="02020603050405020304" pitchFamily="18" charset="0"/>
+              </a:rPr>
+              <a:t> </a:t>
+            </a:r>
+            <a:r>
+              <a:rPr lang="en-US" dirty="0">
+                <a:effectLst/>
+                <a:latin typeface="Times New Roman" panose="02020603050405020304" pitchFamily="18" charset="0"/>
+                <a:ea typeface="Times New Roman" panose="02020603050405020304" pitchFamily="18" charset="0"/>
+              </a:rPr>
+              <a:t>the resistor</a:t>
+            </a:r>
+            <a:r>
+              <a:rPr lang="en-US" spc="-5" dirty="0">
+                <a:effectLst/>
+                <a:latin typeface="Times New Roman" panose="02020603050405020304" pitchFamily="18" charset="0"/>
+                <a:ea typeface="Times New Roman" panose="02020603050405020304" pitchFamily="18" charset="0"/>
+              </a:rPr>
+              <a:t> </a:t>
+            </a:r>
+            <a:r>
+              <a:rPr lang="en-US" dirty="0">
+                <a:effectLst/>
+                <a:latin typeface="Times New Roman" panose="02020603050405020304" pitchFamily="18" charset="0"/>
+                <a:ea typeface="Times New Roman" panose="02020603050405020304" pitchFamily="18" charset="0"/>
+              </a:rPr>
+              <a:t>and the </a:t>
+            </a:r>
+            <a:r>
+              <a:rPr lang="en-US" spc="-10" dirty="0">
+                <a:effectLst/>
+                <a:latin typeface="Times New Roman" panose="02020603050405020304" pitchFamily="18" charset="0"/>
+                <a:ea typeface="Times New Roman" panose="02020603050405020304" pitchFamily="18" charset="0"/>
+              </a:rPr>
+              <a:t>inductor</a:t>
+            </a:r>
+            <a:endParaRPr lang="en-MY" dirty="0">
+              <a:effectLst/>
+              <a:latin typeface="Times New Roman" panose="02020603050405020304" pitchFamily="18" charset="0"/>
+              <a:ea typeface="Times New Roman" panose="02020603050405020304" pitchFamily="18" charset="0"/>
+            </a:endParaRPr>
+          </a:p>
+          <a:p>
+            <a:pPr marL="742950" lvl="1" indent="-285750">
+              <a:spcBef>
+                <a:spcPts val="685"/>
+              </a:spcBef>
+              <a:buFont typeface="+mj-lt"/>
+              <a:buAutoNum type="alphaLcPeriod"/>
+              <a:tabLst>
+                <a:tab pos="1003935" algn="l"/>
+              </a:tabLst>
+            </a:pPr>
+            <a:r>
+              <a:rPr lang="en-US" dirty="0">
+                <a:effectLst/>
+                <a:latin typeface="Times New Roman" panose="02020603050405020304" pitchFamily="18" charset="0"/>
+                <a:ea typeface="Times New Roman" panose="02020603050405020304" pitchFamily="18" charset="0"/>
+              </a:rPr>
+              <a:t>the</a:t>
+            </a:r>
+            <a:r>
+              <a:rPr lang="en-US" spc="-5" dirty="0">
+                <a:effectLst/>
+                <a:latin typeface="Times New Roman" panose="02020603050405020304" pitchFamily="18" charset="0"/>
+                <a:ea typeface="Times New Roman" panose="02020603050405020304" pitchFamily="18" charset="0"/>
+              </a:rPr>
+              <a:t> </a:t>
+            </a:r>
+            <a:r>
+              <a:rPr lang="en-US" dirty="0">
+                <a:effectLst/>
+                <a:latin typeface="Times New Roman" panose="02020603050405020304" pitchFamily="18" charset="0"/>
+                <a:ea typeface="Times New Roman" panose="02020603050405020304" pitchFamily="18" charset="0"/>
+              </a:rPr>
+              <a:t>phase</a:t>
+            </a:r>
+            <a:r>
+              <a:rPr lang="en-US" spc="-10" dirty="0">
+                <a:effectLst/>
+                <a:latin typeface="Times New Roman" panose="02020603050405020304" pitchFamily="18" charset="0"/>
+                <a:ea typeface="Times New Roman" panose="02020603050405020304" pitchFamily="18" charset="0"/>
+              </a:rPr>
+              <a:t> </a:t>
+            </a:r>
+            <a:r>
+              <a:rPr lang="en-US" dirty="0">
+                <a:effectLst/>
+                <a:latin typeface="Times New Roman" panose="02020603050405020304" pitchFamily="18" charset="0"/>
+                <a:ea typeface="Times New Roman" panose="02020603050405020304" pitchFamily="18" charset="0"/>
+              </a:rPr>
+              <a:t>angle between</a:t>
+            </a:r>
+            <a:r>
+              <a:rPr lang="en-US" spc="5" dirty="0">
+                <a:effectLst/>
+                <a:latin typeface="Times New Roman" panose="02020603050405020304" pitchFamily="18" charset="0"/>
+                <a:ea typeface="Times New Roman" panose="02020603050405020304" pitchFamily="18" charset="0"/>
+              </a:rPr>
+              <a:t> </a:t>
+            </a:r>
+            <a:r>
+              <a:rPr lang="en-US" dirty="0">
+                <a:effectLst/>
+                <a:latin typeface="Times New Roman" panose="02020603050405020304" pitchFamily="18" charset="0"/>
+                <a:ea typeface="Times New Roman" panose="02020603050405020304" pitchFamily="18" charset="0"/>
+              </a:rPr>
+              <a:t>the voltage</a:t>
+            </a:r>
+            <a:r>
+              <a:rPr lang="en-US" spc="-15" dirty="0">
+                <a:effectLst/>
+                <a:latin typeface="Times New Roman" panose="02020603050405020304" pitchFamily="18" charset="0"/>
+                <a:ea typeface="Times New Roman" panose="02020603050405020304" pitchFamily="18" charset="0"/>
+              </a:rPr>
+              <a:t> </a:t>
+            </a:r>
+            <a:r>
+              <a:rPr lang="en-US" dirty="0">
+                <a:effectLst/>
+                <a:latin typeface="Times New Roman" panose="02020603050405020304" pitchFamily="18" charset="0"/>
+                <a:ea typeface="Times New Roman" panose="02020603050405020304" pitchFamily="18" charset="0"/>
+              </a:rPr>
+              <a:t>and </a:t>
+            </a:r>
+            <a:r>
+              <a:rPr lang="en-US" spc="-10" dirty="0">
+                <a:effectLst/>
+                <a:latin typeface="Times New Roman" panose="02020603050405020304" pitchFamily="18" charset="0"/>
+                <a:ea typeface="Times New Roman" panose="02020603050405020304" pitchFamily="18" charset="0"/>
+              </a:rPr>
+              <a:t>current</a:t>
+            </a:r>
+            <a:endParaRPr lang="en-MY" dirty="0">
+              <a:effectLst/>
+              <a:latin typeface="Times New Roman" panose="02020603050405020304" pitchFamily="18" charset="0"/>
+              <a:ea typeface="Times New Roman" panose="02020603050405020304" pitchFamily="18" charset="0"/>
+            </a:endParaRPr>
+          </a:p>
+          <a:p>
+            <a:pPr marL="742950" marR="15875" lvl="1" indent="-285750">
+              <a:lnSpc>
+                <a:spcPct val="150000"/>
+              </a:lnSpc>
+              <a:spcBef>
+                <a:spcPts val="695"/>
+              </a:spcBef>
+              <a:buFont typeface="+mj-lt"/>
+              <a:buAutoNum type="alphaLcPeriod"/>
+              <a:tabLst>
+                <a:tab pos="1003935" algn="l"/>
+              </a:tabLst>
+            </a:pPr>
+            <a:r>
+              <a:rPr lang="en-US" dirty="0">
+                <a:effectLst/>
+                <a:latin typeface="Times New Roman" panose="02020603050405020304" pitchFamily="18" charset="0"/>
+                <a:ea typeface="Times New Roman" panose="02020603050405020304" pitchFamily="18" charset="0"/>
+              </a:rPr>
+              <a:t>the</a:t>
+            </a:r>
+            <a:r>
+              <a:rPr lang="en-US" spc="325" dirty="0">
+                <a:effectLst/>
+                <a:latin typeface="Times New Roman" panose="02020603050405020304" pitchFamily="18" charset="0"/>
+                <a:ea typeface="Times New Roman" panose="02020603050405020304" pitchFamily="18" charset="0"/>
+              </a:rPr>
+              <a:t> </a:t>
+            </a:r>
+            <a:r>
+              <a:rPr lang="en-US" dirty="0">
+                <a:effectLst/>
+                <a:latin typeface="Times New Roman" panose="02020603050405020304" pitchFamily="18" charset="0"/>
+                <a:ea typeface="Times New Roman" panose="02020603050405020304" pitchFamily="18" charset="0"/>
+              </a:rPr>
+              <a:t>value</a:t>
+            </a:r>
+            <a:r>
+              <a:rPr lang="en-US" spc="325" dirty="0">
+                <a:effectLst/>
+                <a:latin typeface="Times New Roman" panose="02020603050405020304" pitchFamily="18" charset="0"/>
+                <a:ea typeface="Times New Roman" panose="02020603050405020304" pitchFamily="18" charset="0"/>
+              </a:rPr>
+              <a:t> </a:t>
+            </a:r>
+            <a:r>
+              <a:rPr lang="en-US" dirty="0">
+                <a:effectLst/>
+                <a:latin typeface="Times New Roman" panose="02020603050405020304" pitchFamily="18" charset="0"/>
+                <a:ea typeface="Times New Roman" panose="02020603050405020304" pitchFamily="18" charset="0"/>
+              </a:rPr>
+              <a:t>of</a:t>
+            </a:r>
+            <a:r>
+              <a:rPr lang="en-US" spc="325" dirty="0">
+                <a:effectLst/>
+                <a:latin typeface="Times New Roman" panose="02020603050405020304" pitchFamily="18" charset="0"/>
+                <a:ea typeface="Times New Roman" panose="02020603050405020304" pitchFamily="18" charset="0"/>
+              </a:rPr>
+              <a:t> </a:t>
+            </a:r>
+            <a:r>
+              <a:rPr lang="en-US" dirty="0">
+                <a:effectLst/>
+                <a:latin typeface="Times New Roman" panose="02020603050405020304" pitchFamily="18" charset="0"/>
+                <a:ea typeface="Times New Roman" panose="02020603050405020304" pitchFamily="18" charset="0"/>
+              </a:rPr>
+              <a:t>the</a:t>
+            </a:r>
+            <a:r>
+              <a:rPr lang="en-US" spc="325" dirty="0">
+                <a:effectLst/>
+                <a:latin typeface="Times New Roman" panose="02020603050405020304" pitchFamily="18" charset="0"/>
+                <a:ea typeface="Times New Roman" panose="02020603050405020304" pitchFamily="18" charset="0"/>
+              </a:rPr>
+              <a:t> </a:t>
+            </a:r>
+            <a:r>
+              <a:rPr lang="en-US" dirty="0">
+                <a:effectLst/>
+                <a:latin typeface="Times New Roman" panose="02020603050405020304" pitchFamily="18" charset="0"/>
+                <a:ea typeface="Times New Roman" panose="02020603050405020304" pitchFamily="18" charset="0"/>
+              </a:rPr>
+              <a:t>capacitance</a:t>
+            </a:r>
+            <a:r>
+              <a:rPr lang="en-US" spc="325" dirty="0">
+                <a:effectLst/>
+                <a:latin typeface="Times New Roman" panose="02020603050405020304" pitchFamily="18" charset="0"/>
+                <a:ea typeface="Times New Roman" panose="02020603050405020304" pitchFamily="18" charset="0"/>
+              </a:rPr>
+              <a:t> </a:t>
+            </a:r>
+            <a:r>
+              <a:rPr lang="en-US" dirty="0">
+                <a:effectLst/>
+                <a:latin typeface="Times New Roman" panose="02020603050405020304" pitchFamily="18" charset="0"/>
+                <a:ea typeface="Times New Roman" panose="02020603050405020304" pitchFamily="18" charset="0"/>
+              </a:rPr>
+              <a:t>should</a:t>
+            </a:r>
+            <a:r>
+              <a:rPr lang="en-US" spc="330" dirty="0">
+                <a:effectLst/>
+                <a:latin typeface="Times New Roman" panose="02020603050405020304" pitchFamily="18" charset="0"/>
+                <a:ea typeface="Times New Roman" panose="02020603050405020304" pitchFamily="18" charset="0"/>
+              </a:rPr>
+              <a:t> </a:t>
+            </a:r>
+            <a:r>
+              <a:rPr lang="en-US" dirty="0">
+                <a:effectLst/>
+                <a:latin typeface="Times New Roman" panose="02020603050405020304" pitchFamily="18" charset="0"/>
+                <a:ea typeface="Times New Roman" panose="02020603050405020304" pitchFamily="18" charset="0"/>
+              </a:rPr>
+              <a:t>be</a:t>
+            </a:r>
+            <a:r>
+              <a:rPr lang="en-US" spc="325" dirty="0">
+                <a:effectLst/>
+                <a:latin typeface="Times New Roman" panose="02020603050405020304" pitchFamily="18" charset="0"/>
+                <a:ea typeface="Times New Roman" panose="02020603050405020304" pitchFamily="18" charset="0"/>
+              </a:rPr>
+              <a:t> </a:t>
+            </a:r>
+            <a:r>
+              <a:rPr lang="en-US" dirty="0">
+                <a:effectLst/>
+                <a:latin typeface="Times New Roman" panose="02020603050405020304" pitchFamily="18" charset="0"/>
+                <a:ea typeface="Times New Roman" panose="02020603050405020304" pitchFamily="18" charset="0"/>
+              </a:rPr>
+              <a:t>added</a:t>
+            </a:r>
+            <a:r>
+              <a:rPr lang="en-US" spc="340" dirty="0">
+                <a:effectLst/>
+                <a:latin typeface="Times New Roman" panose="02020603050405020304" pitchFamily="18" charset="0"/>
+                <a:ea typeface="Times New Roman" panose="02020603050405020304" pitchFamily="18" charset="0"/>
+              </a:rPr>
+              <a:t> </a:t>
+            </a:r>
+            <a:r>
+              <a:rPr lang="en-US" dirty="0">
+                <a:effectLst/>
+                <a:latin typeface="Times New Roman" panose="02020603050405020304" pitchFamily="18" charset="0"/>
+                <a:ea typeface="Times New Roman" panose="02020603050405020304" pitchFamily="18" charset="0"/>
+              </a:rPr>
+              <a:t>so</a:t>
+            </a:r>
+            <a:r>
+              <a:rPr lang="en-US" spc="330" dirty="0">
+                <a:effectLst/>
+                <a:latin typeface="Times New Roman" panose="02020603050405020304" pitchFamily="18" charset="0"/>
+                <a:ea typeface="Times New Roman" panose="02020603050405020304" pitchFamily="18" charset="0"/>
+              </a:rPr>
+              <a:t> </a:t>
+            </a:r>
+            <a:r>
+              <a:rPr lang="en-US" dirty="0">
+                <a:effectLst/>
+                <a:latin typeface="Times New Roman" panose="02020603050405020304" pitchFamily="18" charset="0"/>
+                <a:ea typeface="Times New Roman" panose="02020603050405020304" pitchFamily="18" charset="0"/>
+              </a:rPr>
+              <a:t>that</a:t>
+            </a:r>
+            <a:r>
+              <a:rPr lang="en-US" spc="330" dirty="0">
+                <a:effectLst/>
+                <a:latin typeface="Times New Roman" panose="02020603050405020304" pitchFamily="18" charset="0"/>
+                <a:ea typeface="Times New Roman" panose="02020603050405020304" pitchFamily="18" charset="0"/>
+              </a:rPr>
+              <a:t> </a:t>
+            </a:r>
+            <a:r>
+              <a:rPr lang="en-US" dirty="0">
+                <a:effectLst/>
+                <a:latin typeface="Times New Roman" panose="02020603050405020304" pitchFamily="18" charset="0"/>
+                <a:ea typeface="Times New Roman" panose="02020603050405020304" pitchFamily="18" charset="0"/>
+              </a:rPr>
+              <a:t>the</a:t>
+            </a:r>
+            <a:r>
+              <a:rPr lang="en-US" spc="325" dirty="0">
+                <a:effectLst/>
+                <a:latin typeface="Times New Roman" panose="02020603050405020304" pitchFamily="18" charset="0"/>
+                <a:ea typeface="Times New Roman" panose="02020603050405020304" pitchFamily="18" charset="0"/>
+              </a:rPr>
+              <a:t> </a:t>
+            </a:r>
+            <a:r>
+              <a:rPr lang="en-US" dirty="0">
+                <a:effectLst/>
+                <a:latin typeface="Times New Roman" panose="02020603050405020304" pitchFamily="18" charset="0"/>
+                <a:ea typeface="Times New Roman" panose="02020603050405020304" pitchFamily="18" charset="0"/>
+              </a:rPr>
+              <a:t>voltage</a:t>
+            </a:r>
+            <a:r>
+              <a:rPr lang="en-US" spc="325" dirty="0">
+                <a:effectLst/>
+                <a:latin typeface="Times New Roman" panose="02020603050405020304" pitchFamily="18" charset="0"/>
+                <a:ea typeface="Times New Roman" panose="02020603050405020304" pitchFamily="18" charset="0"/>
+              </a:rPr>
+              <a:t> </a:t>
+            </a:r>
+            <a:r>
+              <a:rPr lang="en-US" dirty="0">
+                <a:effectLst/>
+                <a:latin typeface="Times New Roman" panose="02020603050405020304" pitchFamily="18" charset="0"/>
+                <a:ea typeface="Times New Roman" panose="02020603050405020304" pitchFamily="18" charset="0"/>
+              </a:rPr>
+              <a:t>of</a:t>
+            </a:r>
+            <a:r>
+              <a:rPr lang="en-US" spc="325" dirty="0">
+                <a:effectLst/>
+                <a:latin typeface="Times New Roman" panose="02020603050405020304" pitchFamily="18" charset="0"/>
+                <a:ea typeface="Times New Roman" panose="02020603050405020304" pitchFamily="18" charset="0"/>
+              </a:rPr>
+              <a:t> </a:t>
+            </a:r>
+            <a:r>
+              <a:rPr lang="en-US" dirty="0">
+                <a:effectLst/>
+                <a:latin typeface="Times New Roman" panose="02020603050405020304" pitchFamily="18" charset="0"/>
+                <a:ea typeface="Times New Roman" panose="02020603050405020304" pitchFamily="18" charset="0"/>
+              </a:rPr>
+              <a:t>the circuit is in phase with the current of the circuit.</a:t>
+            </a:r>
+            <a:endParaRPr lang="en-MY" dirty="0">
+              <a:effectLst/>
+              <a:latin typeface="Times New Roman" panose="02020603050405020304" pitchFamily="18" charset="0"/>
+              <a:ea typeface="Times New Roman" panose="02020603050405020304" pitchFamily="18" charset="0"/>
+            </a:endParaRPr>
+          </a:p>
+          <a:p>
+            <a:pPr marR="12700" algn="r">
+              <a:spcBef>
+                <a:spcPts val="5"/>
+              </a:spcBef>
+              <a:buNone/>
+            </a:pPr>
+            <a:r>
+              <a:rPr lang="en-US" dirty="0">
+                <a:effectLst/>
+                <a:latin typeface="Times New Roman" panose="02020603050405020304" pitchFamily="18" charset="0"/>
+                <a:ea typeface="Times New Roman" panose="02020603050405020304" pitchFamily="18" charset="0"/>
+              </a:rPr>
+              <a:t>[10</a:t>
+            </a:r>
+            <a:r>
+              <a:rPr lang="en-US" spc="-5" dirty="0">
+                <a:effectLst/>
+                <a:latin typeface="Times New Roman" panose="02020603050405020304" pitchFamily="18" charset="0"/>
+                <a:ea typeface="Times New Roman" panose="02020603050405020304" pitchFamily="18" charset="0"/>
+              </a:rPr>
+              <a:t> </a:t>
+            </a:r>
+            <a:r>
+              <a:rPr lang="en-US" i="1" spc="-10" dirty="0">
+                <a:effectLst/>
+                <a:latin typeface="Times New Roman" panose="02020603050405020304" pitchFamily="18" charset="0"/>
+                <a:ea typeface="Times New Roman" panose="02020603050405020304" pitchFamily="18" charset="0"/>
+              </a:rPr>
+              <a:t>marks</a:t>
+            </a:r>
+            <a:r>
+              <a:rPr lang="en-US" spc="-10" dirty="0">
+                <a:effectLst/>
+                <a:latin typeface="Times New Roman" panose="02020603050405020304" pitchFamily="18" charset="0"/>
+                <a:ea typeface="Times New Roman" panose="02020603050405020304" pitchFamily="18" charset="0"/>
+              </a:rPr>
+              <a:t>]</a:t>
+            </a:r>
+            <a:endParaRPr lang="en-MY" dirty="0">
+              <a:effectLst/>
+              <a:latin typeface="Times New Roman" panose="02020603050405020304" pitchFamily="18" charset="0"/>
+              <a:ea typeface="Times New Roman" panose="02020603050405020304" pitchFamily="18" charset="0"/>
+            </a:endParaRPr>
+          </a:p>
+        </p:txBody>
+      </p:sp>
+      <p:pic>
+        <p:nvPicPr>
+          <p:cNvPr id="5" name="Picture 4">
+            <a:extLst>
+              <a:ext uri="{FF2B5EF4-FFF2-40B4-BE49-F238E27FC236}">
+                <a16:creationId xmlns:a16="http://schemas.microsoft.com/office/drawing/2014/main" id="{3219CCA5-D9E1-61F3-4D0D-270F9B6EC28F}"/>
+              </a:ext>
+            </a:extLst>
+          </p:cNvPr>
+          <p:cNvPicPr>
+            <a:picLocks noChangeAspect="1"/>
+          </p:cNvPicPr>
+          <p:nvPr/>
+        </p:nvPicPr>
+        <p:blipFill>
+          <a:blip r:embed="rId2"/>
+          <a:stretch>
+            <a:fillRect/>
+          </a:stretch>
+        </p:blipFill>
+        <p:spPr>
+          <a:xfrm>
+            <a:off x="560685" y="5159623"/>
+            <a:ext cx="3077004" cy="1152686"/>
+          </a:xfrm>
+          <a:prstGeom prst="rect">
+            <a:avLst/>
+          </a:prstGeom>
+        </p:spPr>
+      </p:pic>
+    </p:spTree>
+    <p:extLst>
+      <p:ext uri="{BB962C8B-B14F-4D97-AF65-F5344CB8AC3E}">
+        <p14:creationId xmlns:p14="http://schemas.microsoft.com/office/powerpoint/2010/main" val="4272790702"/>
+      </p:ext>
+    </p:extLst>
+  </p:cSld>
+  <p:clrMapOvr>
+    <a:masterClrMapping/>
+  </p:clrMapOvr>
+</p:sld>
+</file>
+
+<file path=ppt/slides/slide8.xml><?xml version="1.0" encoding="utf-8"?>
+<p:sld xmlns:a="http://schemas.openxmlformats.org/drawingml/2006/main" xmlns:r="http://schemas.openxmlformats.org/officeDocument/2006/relationships" xmlns:p="http://schemas.openxmlformats.org/presentationml/2006/main">
+  <p:cSld>
+    <p:spTree>
+      <p:nvGrpSpPr>
+        <p:cNvPr id="1" name=""/>
+        <p:cNvGrpSpPr/>
+        <p:nvPr/>
+      </p:nvGrpSpPr>
+      <p:grpSpPr>
+        <a:xfrm>
+          <a:off x="0" y="0"/>
+          <a:ext cx="0" cy="0"/>
+          <a:chOff x="0" y="0"/>
+          <a:chExt cx="0" cy="0"/>
+        </a:xfrm>
+      </p:grpSpPr>
+      <p:sp>
+        <p:nvSpPr>
+          <p:cNvPr id="3" name="TextBox 2">
+            <a:extLst>
+              <a:ext uri="{FF2B5EF4-FFF2-40B4-BE49-F238E27FC236}">
+                <a16:creationId xmlns:a16="http://schemas.microsoft.com/office/drawing/2014/main" id="{92AE3E1B-FF03-547B-CE81-22D0ED2F55AC}"/>
+              </a:ext>
+            </a:extLst>
+          </p:cNvPr>
+          <p:cNvSpPr txBox="1"/>
+          <p:nvPr/>
+        </p:nvSpPr>
+        <p:spPr>
+          <a:xfrm>
+            <a:off x="464023" y="431254"/>
+            <a:ext cx="10713493" cy="3139321"/>
+          </a:xfrm>
+          <a:prstGeom prst="rect">
+            <a:avLst/>
+          </a:prstGeom>
+          <a:noFill/>
+        </p:spPr>
+        <p:txBody>
+          <a:bodyPr wrap="square">
+            <a:spAutoFit/>
+          </a:bodyPr>
+          <a:lstStyle/>
+          <a:p>
+            <a:pPr>
+              <a:buNone/>
+            </a:pPr>
+            <a:r>
+              <a:rPr lang="en-MY" sz="1800" b="1" dirty="0">
+                <a:solidFill>
+                  <a:srgbClr val="000000"/>
+                </a:solidFill>
+                <a:effectLst/>
+                <a:latin typeface="Times New Roman" panose="02020603050405020304" pitchFamily="18" charset="0"/>
+                <a:ea typeface="Aptos" panose="020B0004020202020204" pitchFamily="34" charset="0"/>
+              </a:rPr>
+              <a:t>5</a:t>
+            </a:r>
+            <a:r>
+              <a:rPr lang="en-MY" sz="1800" dirty="0">
+                <a:solidFill>
+                  <a:srgbClr val="000000"/>
+                </a:solidFill>
+                <a:effectLst/>
+                <a:latin typeface="Times New Roman" panose="02020603050405020304" pitchFamily="18" charset="0"/>
+                <a:ea typeface="Aptos" panose="020B0004020202020204" pitchFamily="34" charset="0"/>
+              </a:rPr>
+              <a:t> (a) An AC current of angular frequency of 1.0 x 10</a:t>
+            </a:r>
+            <a:r>
+              <a:rPr lang="en-MY" sz="1800" baseline="30000" dirty="0">
+                <a:solidFill>
+                  <a:srgbClr val="000000"/>
+                </a:solidFill>
+                <a:effectLst/>
+                <a:latin typeface="Times New Roman" panose="02020603050405020304" pitchFamily="18" charset="0"/>
+                <a:ea typeface="Aptos" panose="020B0004020202020204" pitchFamily="34" charset="0"/>
+              </a:rPr>
+              <a:t>4</a:t>
+            </a:r>
+            <a:r>
+              <a:rPr lang="en-MY" sz="1800" dirty="0">
+                <a:solidFill>
+                  <a:srgbClr val="000000"/>
+                </a:solidFill>
+                <a:effectLst/>
+                <a:latin typeface="Times New Roman" panose="02020603050405020304" pitchFamily="18" charset="0"/>
+                <a:ea typeface="Aptos" panose="020B0004020202020204" pitchFamily="34" charset="0"/>
+              </a:rPr>
+              <a:t> rad s</a:t>
+            </a:r>
+            <a:r>
+              <a:rPr lang="en-MY" sz="1800" baseline="30000" dirty="0">
+                <a:solidFill>
+                  <a:srgbClr val="000000"/>
+                </a:solidFill>
+                <a:effectLst/>
+                <a:latin typeface="Times New Roman" panose="02020603050405020304" pitchFamily="18" charset="0"/>
+                <a:ea typeface="Aptos" panose="020B0004020202020204" pitchFamily="34" charset="0"/>
+              </a:rPr>
+              <a:t>-1</a:t>
+            </a:r>
+            <a:r>
+              <a:rPr lang="en-MY" sz="1800" dirty="0">
+                <a:solidFill>
+                  <a:srgbClr val="000000"/>
+                </a:solidFill>
+                <a:effectLst/>
+                <a:latin typeface="Times New Roman" panose="02020603050405020304" pitchFamily="18" charset="0"/>
+                <a:ea typeface="Aptos" panose="020B0004020202020204" pitchFamily="34" charset="0"/>
+              </a:rPr>
+              <a:t> flows through a 10 kΩ resistor and a 0.10 µF capacitor which are connected in series. Calculate the rms voltage across the capacitor if the rms voltage across the resistor is 20 V. 																				[3 marks] </a:t>
+            </a:r>
+            <a:endParaRPr lang="en-MY" sz="2000" dirty="0">
+              <a:solidFill>
+                <a:srgbClr val="000000"/>
+              </a:solidFill>
+              <a:effectLst/>
+              <a:latin typeface="Times New Roman" panose="02020603050405020304" pitchFamily="18" charset="0"/>
+              <a:ea typeface="Aptos" panose="020B0004020202020204" pitchFamily="34" charset="0"/>
+            </a:endParaRPr>
+          </a:p>
+          <a:p>
+            <a:pPr>
+              <a:buNone/>
+            </a:pPr>
+            <a:r>
+              <a:rPr lang="en-MY" sz="1800" dirty="0">
+                <a:solidFill>
+                  <a:srgbClr val="000000"/>
+                </a:solidFill>
+                <a:effectLst/>
+                <a:latin typeface="Times New Roman" panose="02020603050405020304" pitchFamily="18" charset="0"/>
+                <a:ea typeface="Aptos" panose="020B0004020202020204" pitchFamily="34" charset="0"/>
+              </a:rPr>
+              <a:t>(b) A 200 Ω resistor, a 0.75 H inductor and a capacitor of capacitance </a:t>
+            </a:r>
+            <a:r>
+              <a:rPr lang="en-MY" sz="1800" i="1" dirty="0">
+                <a:solidFill>
+                  <a:srgbClr val="000000"/>
+                </a:solidFill>
+                <a:effectLst/>
+                <a:latin typeface="Times New Roman" panose="02020603050405020304" pitchFamily="18" charset="0"/>
+                <a:ea typeface="Aptos" panose="020B0004020202020204" pitchFamily="34" charset="0"/>
+              </a:rPr>
+              <a:t>C </a:t>
+            </a:r>
+            <a:r>
+              <a:rPr lang="en-MY" sz="1800" dirty="0">
+                <a:solidFill>
+                  <a:srgbClr val="000000"/>
+                </a:solidFill>
+                <a:effectLst/>
+                <a:latin typeface="Times New Roman" panose="02020603050405020304" pitchFamily="18" charset="0"/>
+                <a:ea typeface="Aptos" panose="020B0004020202020204" pitchFamily="34" charset="0"/>
+              </a:rPr>
+              <a:t>are connected in series to an alternating source 250 V, 600 Hz. If the current in the circuit is maximum, calculate the </a:t>
+            </a:r>
+            <a:endParaRPr lang="en-MY" sz="2000" dirty="0">
+              <a:solidFill>
+                <a:srgbClr val="000000"/>
+              </a:solidFill>
+              <a:effectLst/>
+              <a:latin typeface="Times New Roman" panose="02020603050405020304" pitchFamily="18" charset="0"/>
+              <a:ea typeface="Aptos" panose="020B0004020202020204" pitchFamily="34" charset="0"/>
+            </a:endParaRPr>
+          </a:p>
+          <a:p>
+            <a:pPr>
+              <a:buNone/>
+            </a:pPr>
+            <a:r>
+              <a:rPr lang="en-MY" sz="1800" dirty="0">
+                <a:solidFill>
+                  <a:srgbClr val="000000"/>
+                </a:solidFill>
+                <a:effectLst/>
+                <a:latin typeface="Times New Roman" panose="02020603050405020304" pitchFamily="18" charset="0"/>
+                <a:ea typeface="Aptos" panose="020B0004020202020204" pitchFamily="34" charset="0"/>
+              </a:rPr>
+              <a:t>(</a:t>
+            </a:r>
+            <a:r>
+              <a:rPr lang="en-MY" sz="1800" dirty="0" err="1">
+                <a:solidFill>
+                  <a:srgbClr val="000000"/>
+                </a:solidFill>
+                <a:effectLst/>
+                <a:latin typeface="Times New Roman" panose="02020603050405020304" pitchFamily="18" charset="0"/>
+                <a:ea typeface="Aptos" panose="020B0004020202020204" pitchFamily="34" charset="0"/>
+              </a:rPr>
+              <a:t>i</a:t>
+            </a:r>
+            <a:r>
+              <a:rPr lang="en-MY" sz="1800" dirty="0">
+                <a:solidFill>
+                  <a:srgbClr val="000000"/>
+                </a:solidFill>
+                <a:effectLst/>
+                <a:latin typeface="Times New Roman" panose="02020603050405020304" pitchFamily="18" charset="0"/>
+                <a:ea typeface="Aptos" panose="020B0004020202020204" pitchFamily="34" charset="0"/>
+              </a:rPr>
+              <a:t>) capacitive reactance. </a:t>
+            </a:r>
+            <a:endParaRPr lang="en-MY" sz="2000" dirty="0">
+              <a:solidFill>
+                <a:srgbClr val="000000"/>
+              </a:solidFill>
+              <a:effectLst/>
+              <a:latin typeface="Times New Roman" panose="02020603050405020304" pitchFamily="18" charset="0"/>
+              <a:ea typeface="Aptos" panose="020B0004020202020204" pitchFamily="34" charset="0"/>
+            </a:endParaRPr>
+          </a:p>
+          <a:p>
+            <a:pPr>
+              <a:buNone/>
+            </a:pPr>
+            <a:r>
+              <a:rPr lang="en-MY" sz="1800" dirty="0">
+                <a:solidFill>
+                  <a:srgbClr val="000000"/>
+                </a:solidFill>
+                <a:effectLst/>
+                <a:latin typeface="Times New Roman" panose="02020603050405020304" pitchFamily="18" charset="0"/>
+                <a:ea typeface="Aptos" panose="020B0004020202020204" pitchFamily="34" charset="0"/>
+              </a:rPr>
+              <a:t>(ii) the capacitance </a:t>
+            </a:r>
+            <a:r>
+              <a:rPr lang="en-MY" sz="1800" i="1" dirty="0">
+                <a:solidFill>
+                  <a:srgbClr val="000000"/>
+                </a:solidFill>
+                <a:effectLst/>
+                <a:latin typeface="Times New Roman" panose="02020603050405020304" pitchFamily="18" charset="0"/>
+                <a:ea typeface="Aptos" panose="020B0004020202020204" pitchFamily="34" charset="0"/>
+              </a:rPr>
+              <a:t>C</a:t>
+            </a:r>
+            <a:r>
+              <a:rPr lang="en-MY" sz="1800" dirty="0">
+                <a:solidFill>
+                  <a:srgbClr val="000000"/>
+                </a:solidFill>
+                <a:effectLst/>
+                <a:latin typeface="Times New Roman" panose="02020603050405020304" pitchFamily="18" charset="0"/>
+                <a:ea typeface="Aptos" panose="020B0004020202020204" pitchFamily="34" charset="0"/>
+              </a:rPr>
+              <a:t>. </a:t>
+            </a:r>
+            <a:endParaRPr lang="en-MY" sz="2000" dirty="0">
+              <a:solidFill>
+                <a:srgbClr val="000000"/>
+              </a:solidFill>
+              <a:effectLst/>
+              <a:latin typeface="Times New Roman" panose="02020603050405020304" pitchFamily="18" charset="0"/>
+              <a:ea typeface="Aptos" panose="020B0004020202020204" pitchFamily="34" charset="0"/>
+            </a:endParaRPr>
+          </a:p>
+          <a:p>
+            <a:pPr>
+              <a:buNone/>
+            </a:pPr>
+            <a:r>
+              <a:rPr lang="en-MY" sz="1800" dirty="0">
+                <a:solidFill>
+                  <a:srgbClr val="000000"/>
+                </a:solidFill>
+                <a:effectLst/>
+                <a:latin typeface="Times New Roman" panose="02020603050405020304" pitchFamily="18" charset="0"/>
+                <a:ea typeface="Aptos" panose="020B0004020202020204" pitchFamily="34" charset="0"/>
+              </a:rPr>
+              <a:t>(iii) the impedance of the circuit at resonance. </a:t>
+            </a:r>
+            <a:endParaRPr lang="en-MY" sz="2000" dirty="0">
+              <a:solidFill>
+                <a:srgbClr val="000000"/>
+              </a:solidFill>
+              <a:effectLst/>
+              <a:latin typeface="Times New Roman" panose="02020603050405020304" pitchFamily="18" charset="0"/>
+              <a:ea typeface="Aptos" panose="020B0004020202020204" pitchFamily="34" charset="0"/>
+            </a:endParaRPr>
+          </a:p>
+          <a:p>
+            <a:pPr>
+              <a:buNone/>
+            </a:pPr>
+            <a:r>
+              <a:rPr lang="en-MY" sz="1800" dirty="0">
+                <a:solidFill>
+                  <a:srgbClr val="000000"/>
+                </a:solidFill>
+                <a:effectLst/>
+                <a:latin typeface="Times New Roman" panose="02020603050405020304" pitchFamily="18" charset="0"/>
+                <a:ea typeface="Aptos" panose="020B0004020202020204" pitchFamily="34" charset="0"/>
+              </a:rPr>
+              <a:t>(iv) the current flows through the circuit at resonance. 																[7 marks] </a:t>
+            </a:r>
+            <a:endParaRPr lang="en-MY" sz="2000" dirty="0">
+              <a:solidFill>
+                <a:srgbClr val="000000"/>
+              </a:solidFill>
+              <a:effectLst/>
+              <a:latin typeface="Times New Roman" panose="02020603050405020304" pitchFamily="18" charset="0"/>
+              <a:ea typeface="Aptos" panose="020B0004020202020204" pitchFamily="34" charset="0"/>
+            </a:endParaRPr>
+          </a:p>
+        </p:txBody>
+      </p:sp>
+      <p:pic>
+        <p:nvPicPr>
+          <p:cNvPr id="7" name="Picture 6">
+            <a:extLst>
+              <a:ext uri="{FF2B5EF4-FFF2-40B4-BE49-F238E27FC236}">
+                <a16:creationId xmlns:a16="http://schemas.microsoft.com/office/drawing/2014/main" id="{8D979F2A-4F4A-7610-CB1E-173A6F7D39EF}"/>
+              </a:ext>
+            </a:extLst>
+          </p:cNvPr>
+          <p:cNvPicPr>
+            <a:picLocks noChangeAspect="1"/>
+          </p:cNvPicPr>
+          <p:nvPr/>
+        </p:nvPicPr>
+        <p:blipFill>
+          <a:blip r:embed="rId2"/>
+          <a:stretch>
+            <a:fillRect/>
+          </a:stretch>
+        </p:blipFill>
+        <p:spPr>
+          <a:xfrm>
+            <a:off x="8571917" y="5075964"/>
+            <a:ext cx="2753109" cy="1143160"/>
+          </a:xfrm>
+          <a:prstGeom prst="rect">
+            <a:avLst/>
+          </a:prstGeom>
+        </p:spPr>
+      </p:pic>
+    </p:spTree>
+    <p:extLst>
+      <p:ext uri="{BB962C8B-B14F-4D97-AF65-F5344CB8AC3E}">
+        <p14:creationId xmlns:p14="http://schemas.microsoft.com/office/powerpoint/2010/main" val="2076402889"/>
+      </p:ext>
+    </p:extLst>
+  </p:cSld>
+  <p:clrMapOvr>
+    <a:masterClrMapping/>
+  </p:clrMapOvr>
+</p:sld>
+</file>
+
+<file path=ppt/slides/slide9.xml><?xml version="1.0" encoding="utf-8"?>
+<p:sld xmlns:a="http://schemas.openxmlformats.org/drawingml/2006/main" xmlns:r="http://schemas.openxmlformats.org/officeDocument/2006/relationships" xmlns:p="http://schemas.openxmlformats.org/presentationml/2006/main">
+  <p:cSld>
+    <p:spTree>
+      <p:nvGrpSpPr>
+        <p:cNvPr id="1" name=""/>
+        <p:cNvGrpSpPr/>
+        <p:nvPr/>
+      </p:nvGrpSpPr>
+      <p:grpSpPr>
+        <a:xfrm>
+          <a:off x="0" y="0"/>
+          <a:ext cx="0" cy="0"/>
+          <a:chOff x="0" y="0"/>
+          <a:chExt cx="0" cy="0"/>
+        </a:xfrm>
+      </p:grpSpPr>
+      <p:sp>
+        <p:nvSpPr>
+          <p:cNvPr id="3" name="TextBox 2">
+            <a:extLst>
+              <a:ext uri="{FF2B5EF4-FFF2-40B4-BE49-F238E27FC236}">
+                <a16:creationId xmlns:a16="http://schemas.microsoft.com/office/drawing/2014/main" id="{0B6F9D7B-F908-0DEC-515C-47D9D32ABEC0}"/>
+              </a:ext>
+            </a:extLst>
+          </p:cNvPr>
+          <p:cNvSpPr txBox="1"/>
+          <p:nvPr/>
+        </p:nvSpPr>
+        <p:spPr>
+          <a:xfrm>
+            <a:off x="796412" y="431209"/>
+            <a:ext cx="10943304" cy="1022459"/>
+          </a:xfrm>
+          <a:prstGeom prst="rect">
+            <a:avLst/>
+          </a:prstGeom>
+          <a:noFill/>
+        </p:spPr>
+        <p:txBody>
+          <a:bodyPr wrap="square">
+            <a:spAutoFit/>
+          </a:bodyPr>
+          <a:lstStyle/>
+          <a:p>
+            <a:pPr marR="625475" lvl="0" algn="just">
+              <a:lnSpc>
+                <a:spcPct val="115000"/>
+              </a:lnSpc>
+              <a:spcBef>
+                <a:spcPts val="1230"/>
+              </a:spcBef>
+              <a:tabLst>
+                <a:tab pos="650240" algn="l"/>
+              </a:tabLst>
+            </a:pPr>
+            <a:r>
+              <a:rPr lang="ms-MY" spc="0" dirty="0">
+                <a:effectLst/>
+                <a:latin typeface="Times New Roman" panose="02020603050405020304" pitchFamily="18" charset="0"/>
+                <a:ea typeface="Times New Roman" panose="02020603050405020304" pitchFamily="18" charset="0"/>
+              </a:rPr>
+              <a:t>5   A resistor of resistance, </a:t>
+            </a:r>
+            <a:r>
+              <a:rPr lang="ms-MY" spc="0" dirty="0">
+                <a:effectLst/>
+                <a:latin typeface="Cambria Math" panose="02040503050406030204" pitchFamily="18" charset="0"/>
+                <a:ea typeface="Cambria Math" panose="02040503050406030204" pitchFamily="18" charset="0"/>
+              </a:rPr>
+              <a:t>𝑅 </a:t>
+            </a:r>
+            <a:r>
+              <a:rPr lang="ms-MY" spc="0" dirty="0">
+                <a:effectLst/>
+                <a:latin typeface="Times New Roman" panose="02020603050405020304" pitchFamily="18" charset="0"/>
+                <a:ea typeface="Times New Roman" panose="02020603050405020304" pitchFamily="18" charset="0"/>
+              </a:rPr>
+              <a:t>= 30 Ω, is connected in series with an inductor, </a:t>
+            </a:r>
+            <a:r>
+              <a:rPr lang="ms-MY" spc="0" dirty="0">
+                <a:effectLst/>
+                <a:latin typeface="Cambria Math" panose="02040503050406030204" pitchFamily="18" charset="0"/>
+                <a:ea typeface="Cambria Math" panose="02040503050406030204" pitchFamily="18" charset="0"/>
+              </a:rPr>
+              <a:t>𝐿 </a:t>
+            </a:r>
+            <a:r>
+              <a:rPr lang="ms-MY" spc="0" dirty="0">
+                <a:effectLst/>
+                <a:latin typeface="Times New Roman" panose="02020603050405020304" pitchFamily="18" charset="0"/>
+                <a:ea typeface="Times New Roman" panose="02020603050405020304" pitchFamily="18" charset="0"/>
+              </a:rPr>
+              <a:t>= 50 mH, and a capacitor of capacitance, </a:t>
+            </a:r>
+            <a:r>
+              <a:rPr lang="ms-MY" spc="0" dirty="0">
+                <a:effectLst/>
+                <a:latin typeface="Cambria Math" panose="02040503050406030204" pitchFamily="18" charset="0"/>
+                <a:ea typeface="Cambria Math" panose="02040503050406030204" pitchFamily="18" charset="0"/>
+              </a:rPr>
+              <a:t>𝐶 </a:t>
+            </a:r>
+            <a:r>
+              <a:rPr lang="ms-MY" spc="0" dirty="0">
+                <a:effectLst/>
+                <a:latin typeface="Times New Roman" panose="02020603050405020304" pitchFamily="18" charset="0"/>
+                <a:ea typeface="Times New Roman" panose="02020603050405020304" pitchFamily="18" charset="0"/>
+              </a:rPr>
+              <a:t>= 10 μF. An alternating voltage, </a:t>
+            </a:r>
+            <a:r>
+              <a:rPr lang="ms-MY" spc="0" dirty="0">
+                <a:effectLst/>
+                <a:latin typeface="Cambria Math" panose="02040503050406030204" pitchFamily="18" charset="0"/>
+                <a:ea typeface="Cambria Math" panose="02040503050406030204" pitchFamily="18" charset="0"/>
+              </a:rPr>
+              <a:t>𝑉</a:t>
+            </a:r>
+            <a:r>
+              <a:rPr lang="ms-MY" spc="0" dirty="0">
+                <a:effectLst/>
+                <a:latin typeface="Times New Roman" panose="02020603050405020304" pitchFamily="18" charset="0"/>
+                <a:ea typeface="Times New Roman" panose="02020603050405020304" pitchFamily="18" charset="0"/>
+              </a:rPr>
+              <a:t>rms</a:t>
+            </a:r>
+            <a:r>
+              <a:rPr lang="ms-MY" spc="200" dirty="0">
+                <a:effectLst/>
+                <a:latin typeface="Times New Roman" panose="02020603050405020304" pitchFamily="18" charset="0"/>
+                <a:ea typeface="Times New Roman" panose="02020603050405020304" pitchFamily="18" charset="0"/>
+              </a:rPr>
+              <a:t> </a:t>
+            </a:r>
+            <a:r>
+              <a:rPr lang="ms-MY" spc="0" dirty="0">
+                <a:effectLst/>
+                <a:latin typeface="Times New Roman" panose="02020603050405020304" pitchFamily="18" charset="0"/>
+                <a:ea typeface="Times New Roman" panose="02020603050405020304" pitchFamily="18" charset="0"/>
+              </a:rPr>
+              <a:t>= 80 V, and frequency, 1 kHz is connected across the circuit. Calculate the</a:t>
+            </a:r>
+            <a:endParaRPr lang="en-MY" spc="0" dirty="0">
+              <a:effectLst/>
+              <a:latin typeface="Times New Roman" panose="02020603050405020304" pitchFamily="18" charset="0"/>
+              <a:ea typeface="Times New Roman" panose="02020603050405020304" pitchFamily="18" charset="0"/>
+            </a:endParaRPr>
+          </a:p>
+        </p:txBody>
+      </p:sp>
+      <p:sp>
+        <p:nvSpPr>
+          <p:cNvPr id="5" name="TextBox 4">
+            <a:extLst>
+              <a:ext uri="{FF2B5EF4-FFF2-40B4-BE49-F238E27FC236}">
+                <a16:creationId xmlns:a16="http://schemas.microsoft.com/office/drawing/2014/main" id="{F5DB0C5E-E4CC-2E0F-ABAA-F64EC06EE07A}"/>
+              </a:ext>
+            </a:extLst>
+          </p:cNvPr>
+          <p:cNvSpPr txBox="1"/>
+          <p:nvPr/>
+        </p:nvSpPr>
+        <p:spPr>
+          <a:xfrm>
+            <a:off x="910712" y="1656059"/>
+            <a:ext cx="10666771" cy="1751762"/>
+          </a:xfrm>
+          <a:prstGeom prst="rect">
+            <a:avLst/>
+          </a:prstGeom>
+          <a:noFill/>
+        </p:spPr>
+        <p:txBody>
+          <a:bodyPr wrap="square">
+            <a:spAutoFit/>
+          </a:bodyPr>
+          <a:lstStyle/>
+          <a:p>
+            <a:pPr>
+              <a:lnSpc>
+                <a:spcPts val="1375"/>
+              </a:lnSpc>
+              <a:spcBef>
+                <a:spcPts val="600"/>
+              </a:spcBef>
+              <a:buSzPts val="1100"/>
+              <a:tabLst>
+                <a:tab pos="950595" algn="l"/>
+              </a:tabLst>
+            </a:pPr>
+            <a:r>
+              <a:rPr lang="ms-MY" spc="0" dirty="0">
+                <a:effectLst/>
+                <a:latin typeface="Times New Roman" panose="02020603050405020304" pitchFamily="18" charset="0"/>
+                <a:ea typeface="Times New Roman" panose="02020603050405020304" pitchFamily="18" charset="0"/>
+              </a:rPr>
+              <a:t>(a)   impedance</a:t>
+            </a:r>
+            <a:r>
+              <a:rPr lang="ms-MY" spc="-10" dirty="0">
+                <a:effectLst/>
+                <a:latin typeface="Times New Roman" panose="02020603050405020304" pitchFamily="18" charset="0"/>
+                <a:ea typeface="Times New Roman" panose="02020603050405020304" pitchFamily="18" charset="0"/>
+              </a:rPr>
+              <a:t> </a:t>
+            </a:r>
+            <a:r>
+              <a:rPr lang="ms-MY" spc="0" dirty="0">
+                <a:effectLst/>
+                <a:latin typeface="Times New Roman" panose="02020603050405020304" pitchFamily="18" charset="0"/>
+                <a:ea typeface="Times New Roman" panose="02020603050405020304" pitchFamily="18" charset="0"/>
+              </a:rPr>
+              <a:t>in</a:t>
+            </a:r>
+            <a:r>
+              <a:rPr lang="ms-MY" spc="-5" dirty="0">
+                <a:effectLst/>
+                <a:latin typeface="Times New Roman" panose="02020603050405020304" pitchFamily="18" charset="0"/>
+                <a:ea typeface="Times New Roman" panose="02020603050405020304" pitchFamily="18" charset="0"/>
+              </a:rPr>
+              <a:t> </a:t>
+            </a:r>
+            <a:r>
+              <a:rPr lang="ms-MY" spc="0" dirty="0">
+                <a:effectLst/>
+                <a:latin typeface="Times New Roman" panose="02020603050405020304" pitchFamily="18" charset="0"/>
+                <a:ea typeface="Times New Roman" panose="02020603050405020304" pitchFamily="18" charset="0"/>
+              </a:rPr>
+              <a:t>this</a:t>
+            </a:r>
+            <a:r>
+              <a:rPr lang="ms-MY" spc="-5" dirty="0">
+                <a:effectLst/>
+                <a:latin typeface="Times New Roman" panose="02020603050405020304" pitchFamily="18" charset="0"/>
+                <a:ea typeface="Times New Roman" panose="02020603050405020304" pitchFamily="18" charset="0"/>
+              </a:rPr>
+              <a:t> </a:t>
+            </a:r>
+            <a:r>
+              <a:rPr lang="ms-MY" spc="-10" dirty="0">
+                <a:effectLst/>
+                <a:latin typeface="Times New Roman" panose="02020603050405020304" pitchFamily="18" charset="0"/>
+                <a:ea typeface="Times New Roman" panose="02020603050405020304" pitchFamily="18" charset="0"/>
+              </a:rPr>
+              <a:t>circuit.								</a:t>
+            </a:r>
+            <a:r>
+              <a:rPr lang="ms-MY" dirty="0">
+                <a:latin typeface="Times New Roman" panose="02020603050405020304" pitchFamily="18" charset="0"/>
+                <a:ea typeface="Times New Roman" panose="02020603050405020304" pitchFamily="18" charset="0"/>
+              </a:rPr>
+              <a:t>[3 </a:t>
+            </a:r>
+            <a:r>
+              <a:rPr lang="ms-MY" i="1" spc="-10" dirty="0">
+                <a:latin typeface="Times New Roman" panose="02020603050405020304" pitchFamily="18" charset="0"/>
+                <a:ea typeface="Times New Roman" panose="02020603050405020304" pitchFamily="18" charset="0"/>
+              </a:rPr>
+              <a:t>marks</a:t>
+            </a:r>
+            <a:r>
+              <a:rPr lang="ms-MY" spc="-10" dirty="0">
+                <a:latin typeface="Times New Roman" panose="02020603050405020304" pitchFamily="18" charset="0"/>
+                <a:ea typeface="Times New Roman" panose="02020603050405020304" pitchFamily="18" charset="0"/>
+              </a:rPr>
+              <a:t>]</a:t>
+            </a:r>
+            <a:r>
+              <a:rPr lang="ms-MY" spc="-10" dirty="0">
+                <a:effectLst/>
+                <a:latin typeface="Times New Roman" panose="02020603050405020304" pitchFamily="18" charset="0"/>
+                <a:ea typeface="Times New Roman" panose="02020603050405020304" pitchFamily="18" charset="0"/>
+              </a:rPr>
+              <a:t>					</a:t>
+            </a:r>
+            <a:endParaRPr lang="en-MY" spc="0" dirty="0">
+              <a:effectLst/>
+              <a:latin typeface="Times New Roman" panose="02020603050405020304" pitchFamily="18" charset="0"/>
+              <a:ea typeface="Times New Roman" panose="02020603050405020304" pitchFamily="18" charset="0"/>
+            </a:endParaRPr>
+          </a:p>
+          <a:p>
+            <a:pPr>
+              <a:spcBef>
+                <a:spcPts val="485"/>
+              </a:spcBef>
+              <a:buSzPts val="1100"/>
+              <a:tabLst>
+                <a:tab pos="950595" algn="l"/>
+              </a:tabLst>
+            </a:pPr>
+            <a:r>
+              <a:rPr lang="ms-MY" spc="0" dirty="0">
+                <a:effectLst/>
+                <a:latin typeface="Times New Roman" panose="02020603050405020304" pitchFamily="18" charset="0"/>
+                <a:ea typeface="Times New Roman" panose="02020603050405020304" pitchFamily="18" charset="0"/>
+              </a:rPr>
+              <a:t>(b)   rms</a:t>
+            </a:r>
+            <a:r>
+              <a:rPr lang="ms-MY" spc="-10" dirty="0">
+                <a:effectLst/>
+                <a:latin typeface="Times New Roman" panose="02020603050405020304" pitchFamily="18" charset="0"/>
+                <a:ea typeface="Times New Roman" panose="02020603050405020304" pitchFamily="18" charset="0"/>
+              </a:rPr>
+              <a:t> </a:t>
+            </a:r>
+            <a:r>
+              <a:rPr lang="ms-MY" spc="0" dirty="0">
+                <a:effectLst/>
+                <a:latin typeface="Times New Roman" panose="02020603050405020304" pitchFamily="18" charset="0"/>
+                <a:ea typeface="Times New Roman" panose="02020603050405020304" pitchFamily="18" charset="0"/>
+              </a:rPr>
+              <a:t>current </a:t>
+            </a:r>
+            <a:r>
+              <a:rPr lang="ms-MY" b="1" spc="0" dirty="0">
+                <a:effectLst/>
+                <a:latin typeface="Times New Roman" panose="02020603050405020304" pitchFamily="18" charset="0"/>
+                <a:ea typeface="Times New Roman" panose="02020603050405020304" pitchFamily="18" charset="0"/>
+              </a:rPr>
+              <a:t>and </a:t>
+            </a:r>
+            <a:r>
+              <a:rPr lang="ms-MY" spc="0" dirty="0">
+                <a:effectLst/>
+                <a:latin typeface="Times New Roman" panose="02020603050405020304" pitchFamily="18" charset="0"/>
+                <a:ea typeface="Times New Roman" panose="02020603050405020304" pitchFamily="18" charset="0"/>
+              </a:rPr>
+              <a:t>peak</a:t>
+            </a:r>
+            <a:r>
+              <a:rPr lang="ms-MY" spc="5" dirty="0">
+                <a:effectLst/>
+                <a:latin typeface="Times New Roman" panose="02020603050405020304" pitchFamily="18" charset="0"/>
+                <a:ea typeface="Times New Roman" panose="02020603050405020304" pitchFamily="18" charset="0"/>
+              </a:rPr>
+              <a:t> </a:t>
+            </a:r>
+            <a:r>
+              <a:rPr lang="ms-MY" spc="0" dirty="0">
+                <a:effectLst/>
+                <a:latin typeface="Times New Roman" panose="02020603050405020304" pitchFamily="18" charset="0"/>
+                <a:ea typeface="Times New Roman" panose="02020603050405020304" pitchFamily="18" charset="0"/>
+              </a:rPr>
+              <a:t>current</a:t>
+            </a:r>
+            <a:r>
+              <a:rPr lang="ms-MY" spc="-5" dirty="0">
+                <a:effectLst/>
+                <a:latin typeface="Times New Roman" panose="02020603050405020304" pitchFamily="18" charset="0"/>
+                <a:ea typeface="Times New Roman" panose="02020603050405020304" pitchFamily="18" charset="0"/>
+              </a:rPr>
+              <a:t> </a:t>
+            </a:r>
+            <a:r>
+              <a:rPr lang="ms-MY" spc="0" dirty="0">
+                <a:effectLst/>
+                <a:latin typeface="Times New Roman" panose="02020603050405020304" pitchFamily="18" charset="0"/>
+                <a:ea typeface="Times New Roman" panose="02020603050405020304" pitchFamily="18" charset="0"/>
+              </a:rPr>
+              <a:t>flowing</a:t>
+            </a:r>
+            <a:r>
+              <a:rPr lang="ms-MY" spc="-5" dirty="0">
+                <a:effectLst/>
+                <a:latin typeface="Times New Roman" panose="02020603050405020304" pitchFamily="18" charset="0"/>
+                <a:ea typeface="Times New Roman" panose="02020603050405020304" pitchFamily="18" charset="0"/>
+              </a:rPr>
+              <a:t> </a:t>
+            </a:r>
+            <a:r>
+              <a:rPr lang="ms-MY" spc="0" dirty="0">
+                <a:effectLst/>
+                <a:latin typeface="Times New Roman" panose="02020603050405020304" pitchFamily="18" charset="0"/>
+                <a:ea typeface="Times New Roman" panose="02020603050405020304" pitchFamily="18" charset="0"/>
+              </a:rPr>
+              <a:t>through</a:t>
+            </a:r>
+            <a:r>
+              <a:rPr lang="ms-MY" spc="-5" dirty="0">
+                <a:effectLst/>
+                <a:latin typeface="Times New Roman" panose="02020603050405020304" pitchFamily="18" charset="0"/>
+                <a:ea typeface="Times New Roman" panose="02020603050405020304" pitchFamily="18" charset="0"/>
+              </a:rPr>
+              <a:t> </a:t>
+            </a:r>
+            <a:r>
+              <a:rPr lang="ms-MY" spc="0" dirty="0">
+                <a:effectLst/>
+                <a:latin typeface="Times New Roman" panose="02020603050405020304" pitchFamily="18" charset="0"/>
+                <a:ea typeface="Times New Roman" panose="02020603050405020304" pitchFamily="18" charset="0"/>
+              </a:rPr>
+              <a:t>the </a:t>
+            </a:r>
+            <a:r>
+              <a:rPr lang="ms-MY" spc="-10" dirty="0">
+                <a:effectLst/>
+                <a:latin typeface="Times New Roman" panose="02020603050405020304" pitchFamily="18" charset="0"/>
+                <a:ea typeface="Times New Roman" panose="02020603050405020304" pitchFamily="18" charset="0"/>
+              </a:rPr>
+              <a:t>circuit.				</a:t>
+            </a:r>
+            <a:r>
+              <a:rPr lang="ms-MY" dirty="0">
+                <a:latin typeface="Times New Roman" panose="02020603050405020304" pitchFamily="18" charset="0"/>
+                <a:ea typeface="Times New Roman" panose="02020603050405020304" pitchFamily="18" charset="0"/>
+              </a:rPr>
+              <a:t>[3 </a:t>
+            </a:r>
+            <a:r>
+              <a:rPr lang="ms-MY" i="1" spc="-10" dirty="0">
+                <a:latin typeface="Times New Roman" panose="02020603050405020304" pitchFamily="18" charset="0"/>
+                <a:ea typeface="Times New Roman" panose="02020603050405020304" pitchFamily="18" charset="0"/>
+              </a:rPr>
+              <a:t>marks</a:t>
+            </a:r>
+            <a:r>
+              <a:rPr lang="ms-MY" spc="-10" dirty="0">
+                <a:latin typeface="Times New Roman" panose="02020603050405020304" pitchFamily="18" charset="0"/>
+                <a:ea typeface="Times New Roman" panose="02020603050405020304" pitchFamily="18" charset="0"/>
+              </a:rPr>
+              <a:t>]</a:t>
+            </a:r>
+            <a:endParaRPr lang="en-MY" spc="0" dirty="0">
+              <a:effectLst/>
+              <a:latin typeface="Times New Roman" panose="02020603050405020304" pitchFamily="18" charset="0"/>
+              <a:ea typeface="Times New Roman" panose="02020603050405020304" pitchFamily="18" charset="0"/>
+            </a:endParaRPr>
+          </a:p>
+          <a:p>
+            <a:pPr>
+              <a:spcBef>
+                <a:spcPts val="470"/>
+              </a:spcBef>
+              <a:buSzPts val="1100"/>
+              <a:tabLst>
+                <a:tab pos="950595" algn="l"/>
+              </a:tabLst>
+            </a:pPr>
+            <a:r>
+              <a:rPr lang="ms-MY" spc="0" dirty="0">
+                <a:effectLst/>
+                <a:latin typeface="Times New Roman" panose="02020603050405020304" pitchFamily="18" charset="0"/>
+                <a:ea typeface="Times New Roman" panose="02020603050405020304" pitchFamily="18" charset="0"/>
+              </a:rPr>
+              <a:t>(c)   phase</a:t>
+            </a:r>
+            <a:r>
+              <a:rPr lang="ms-MY" spc="-10" dirty="0">
+                <a:effectLst/>
+                <a:latin typeface="Times New Roman" panose="02020603050405020304" pitchFamily="18" charset="0"/>
+                <a:ea typeface="Times New Roman" panose="02020603050405020304" pitchFamily="18" charset="0"/>
+              </a:rPr>
+              <a:t> </a:t>
+            </a:r>
+            <a:r>
+              <a:rPr lang="ms-MY" spc="0" dirty="0">
+                <a:effectLst/>
+                <a:latin typeface="Times New Roman" panose="02020603050405020304" pitchFamily="18" charset="0"/>
+                <a:ea typeface="Times New Roman" panose="02020603050405020304" pitchFamily="18" charset="0"/>
+              </a:rPr>
+              <a:t>angle</a:t>
+            </a:r>
+            <a:r>
+              <a:rPr lang="ms-MY" spc="-5" dirty="0">
+                <a:effectLst/>
+                <a:latin typeface="Times New Roman" panose="02020603050405020304" pitchFamily="18" charset="0"/>
+                <a:ea typeface="Times New Roman" panose="02020603050405020304" pitchFamily="18" charset="0"/>
+              </a:rPr>
+              <a:t> </a:t>
+            </a:r>
+            <a:r>
+              <a:rPr lang="ms-MY" spc="0" dirty="0">
+                <a:effectLst/>
+                <a:latin typeface="Times New Roman" panose="02020603050405020304" pitchFamily="18" charset="0"/>
+                <a:ea typeface="Times New Roman" panose="02020603050405020304" pitchFamily="18" charset="0"/>
+              </a:rPr>
+              <a:t>by</a:t>
+            </a:r>
+            <a:r>
+              <a:rPr lang="ms-MY" spc="5" dirty="0">
+                <a:effectLst/>
+                <a:latin typeface="Times New Roman" panose="02020603050405020304" pitchFamily="18" charset="0"/>
+                <a:ea typeface="Times New Roman" panose="02020603050405020304" pitchFamily="18" charset="0"/>
+              </a:rPr>
+              <a:t> </a:t>
+            </a:r>
+            <a:r>
+              <a:rPr lang="ms-MY" spc="0" dirty="0">
+                <a:effectLst/>
+                <a:latin typeface="Times New Roman" panose="02020603050405020304" pitchFamily="18" charset="0"/>
+                <a:ea typeface="Times New Roman" panose="02020603050405020304" pitchFamily="18" charset="0"/>
+              </a:rPr>
+              <a:t>referring</a:t>
+            </a:r>
+            <a:r>
+              <a:rPr lang="ms-MY" spc="-5" dirty="0">
+                <a:effectLst/>
+                <a:latin typeface="Times New Roman" panose="02020603050405020304" pitchFamily="18" charset="0"/>
+                <a:ea typeface="Times New Roman" panose="02020603050405020304" pitchFamily="18" charset="0"/>
+              </a:rPr>
+              <a:t> </a:t>
+            </a:r>
+            <a:r>
+              <a:rPr lang="ms-MY" spc="0" dirty="0">
+                <a:effectLst/>
+                <a:latin typeface="Times New Roman" panose="02020603050405020304" pitchFamily="18" charset="0"/>
+                <a:ea typeface="Times New Roman" panose="02020603050405020304" pitchFamily="18" charset="0"/>
+              </a:rPr>
+              <a:t>to the phasor </a:t>
+            </a:r>
+            <a:r>
+              <a:rPr lang="ms-MY" spc="-10" dirty="0">
+                <a:effectLst/>
+                <a:latin typeface="Times New Roman" panose="02020603050405020304" pitchFamily="18" charset="0"/>
+                <a:ea typeface="Times New Roman" panose="02020603050405020304" pitchFamily="18" charset="0"/>
+              </a:rPr>
+              <a:t>diagram.					</a:t>
+            </a:r>
+            <a:r>
+              <a:rPr lang="ms-MY" dirty="0">
+                <a:latin typeface="Times New Roman" panose="02020603050405020304" pitchFamily="18" charset="0"/>
+                <a:ea typeface="Times New Roman" panose="02020603050405020304" pitchFamily="18" charset="0"/>
+              </a:rPr>
+              <a:t>[3 </a:t>
+            </a:r>
+            <a:r>
+              <a:rPr lang="ms-MY" i="1" spc="-10" dirty="0">
+                <a:latin typeface="Times New Roman" panose="02020603050405020304" pitchFamily="18" charset="0"/>
+                <a:ea typeface="Times New Roman" panose="02020603050405020304" pitchFamily="18" charset="0"/>
+              </a:rPr>
+              <a:t>marks</a:t>
+            </a:r>
+            <a:r>
+              <a:rPr lang="ms-MY" spc="-10" dirty="0">
+                <a:latin typeface="Times New Roman" panose="02020603050405020304" pitchFamily="18" charset="0"/>
+                <a:ea typeface="Times New Roman" panose="02020603050405020304" pitchFamily="18" charset="0"/>
+              </a:rPr>
+              <a:t>]</a:t>
+            </a:r>
+            <a:endParaRPr lang="en-MY" spc="0" dirty="0">
+              <a:effectLst/>
+              <a:latin typeface="Times New Roman" panose="02020603050405020304" pitchFamily="18" charset="0"/>
+              <a:ea typeface="Times New Roman" panose="02020603050405020304" pitchFamily="18" charset="0"/>
+            </a:endParaRPr>
+          </a:p>
+          <a:p>
+            <a:pPr>
+              <a:spcBef>
+                <a:spcPts val="475"/>
+              </a:spcBef>
+              <a:buSzPts val="1100"/>
+              <a:tabLst>
+                <a:tab pos="950595" algn="l"/>
+              </a:tabLst>
+            </a:pPr>
+            <a:r>
+              <a:rPr lang="ms-MY" spc="0" dirty="0">
+                <a:effectLst/>
+                <a:latin typeface="Times New Roman" panose="02020603050405020304" pitchFamily="18" charset="0"/>
+                <a:ea typeface="Times New Roman" panose="02020603050405020304" pitchFamily="18" charset="0"/>
+              </a:rPr>
+              <a:t>(d)   power</a:t>
+            </a:r>
+            <a:r>
+              <a:rPr lang="ms-MY" spc="-10" dirty="0">
+                <a:effectLst/>
+                <a:latin typeface="Times New Roman" panose="02020603050405020304" pitchFamily="18" charset="0"/>
+                <a:ea typeface="Times New Roman" panose="02020603050405020304" pitchFamily="18" charset="0"/>
+              </a:rPr>
+              <a:t> factor.									</a:t>
+            </a:r>
+            <a:r>
+              <a:rPr lang="ms-MY" dirty="0">
+                <a:latin typeface="Times New Roman" panose="02020603050405020304" pitchFamily="18" charset="0"/>
+                <a:ea typeface="Times New Roman" panose="02020603050405020304" pitchFamily="18" charset="0"/>
+              </a:rPr>
+              <a:t>[1 </a:t>
+            </a:r>
+            <a:r>
+              <a:rPr lang="ms-MY" i="1" spc="-10" dirty="0">
+                <a:latin typeface="Times New Roman" panose="02020603050405020304" pitchFamily="18" charset="0"/>
+                <a:ea typeface="Times New Roman" panose="02020603050405020304" pitchFamily="18" charset="0"/>
+              </a:rPr>
+              <a:t>marks</a:t>
+            </a:r>
+            <a:r>
+              <a:rPr lang="ms-MY" spc="-10" dirty="0">
+                <a:latin typeface="Times New Roman" panose="02020603050405020304" pitchFamily="18" charset="0"/>
+                <a:ea typeface="Times New Roman" panose="02020603050405020304" pitchFamily="18" charset="0"/>
+              </a:rPr>
+              <a:t>]</a:t>
+            </a:r>
+            <a:endParaRPr lang="en-MY" spc="0" dirty="0">
+              <a:effectLst/>
+              <a:latin typeface="Times New Roman" panose="02020603050405020304" pitchFamily="18" charset="0"/>
+              <a:ea typeface="Times New Roman" panose="02020603050405020304" pitchFamily="18" charset="0"/>
+            </a:endParaRPr>
+          </a:p>
+          <a:p>
+            <a:pPr>
+              <a:buNone/>
+            </a:pPr>
+            <a:endParaRPr lang="en-MY" dirty="0">
+              <a:effectLst/>
+              <a:latin typeface="Times New Roman" panose="02020603050405020304" pitchFamily="18" charset="0"/>
+              <a:ea typeface="Times New Roman" panose="02020603050405020304" pitchFamily="18" charset="0"/>
+            </a:endParaRPr>
+          </a:p>
+        </p:txBody>
+      </p:sp>
+      <p:pic>
+        <p:nvPicPr>
+          <p:cNvPr id="7" name="Picture 6">
+            <a:extLst>
+              <a:ext uri="{FF2B5EF4-FFF2-40B4-BE49-F238E27FC236}">
+                <a16:creationId xmlns:a16="http://schemas.microsoft.com/office/drawing/2014/main" id="{E56FA404-BA50-841E-05C5-E21CFD541ACA}"/>
+              </a:ext>
+            </a:extLst>
+          </p:cNvPr>
+          <p:cNvPicPr>
+            <a:picLocks noChangeAspect="1"/>
+          </p:cNvPicPr>
+          <p:nvPr/>
+        </p:nvPicPr>
+        <p:blipFill>
+          <a:blip r:embed="rId2"/>
+          <a:stretch>
+            <a:fillRect/>
+          </a:stretch>
+        </p:blipFill>
+        <p:spPr>
+          <a:xfrm>
+            <a:off x="8700817" y="4104831"/>
+            <a:ext cx="3038899" cy="1886213"/>
+          </a:xfrm>
+          <a:prstGeom prst="rect">
+            <a:avLst/>
+          </a:prstGeom>
+        </p:spPr>
+      </p:pic>
+    </p:spTree>
+    <p:extLst>
+      <p:ext uri="{BB962C8B-B14F-4D97-AF65-F5344CB8AC3E}">
+        <p14:creationId xmlns:p14="http://schemas.microsoft.com/office/powerpoint/2010/main" val="493405549"/>
       </p:ext>
     </p:extLst>
   </p:cSld>
